--- a/presentation_template.pptx
+++ b/presentation_template.pptx
@@ -2,17 +2,18 @@
 <file path=ppt/presentation.xml><?xml version="1.0" encoding="utf-8"?>
 <p:presentation xmlns:a="http://schemas.openxmlformats.org/drawingml/2006/main" xmlns:r="http://schemas.openxmlformats.org/officeDocument/2006/relationships" xmlns:p="http://schemas.openxmlformats.org/presentationml/2006/main" saveSubsetFonts="1" autoCompressPictures="0">
   <p:sldMasterIdLst>
-    <p:sldMasterId id="2147483648" r:id="rId1"/>
+    <p:sldMasterId id="2147483651" r:id="rId1"/>
+    <p:sldMasterId id="2147483655" r:id="rId2"/>
   </p:sldMasterIdLst>
   <p:notesMasterIdLst>
-    <p:notesMasterId r:id="rId7"/>
+    <p:notesMasterId r:id="rId8"/>
   </p:notesMasterIdLst>
   <p:sldIdLst>
-    <p:sldId id="256" r:id="rId2"/>
-    <p:sldId id="261" r:id="rId3"/>
-    <p:sldId id="262" r:id="rId4"/>
-    <p:sldId id="264" r:id="rId5"/>
-    <p:sldId id="263" r:id="rId6"/>
+    <p:sldId id="266" r:id="rId3"/>
+    <p:sldId id="261" r:id="rId4"/>
+    <p:sldId id="262" r:id="rId5"/>
+    <p:sldId id="264" r:id="rId6"/>
+    <p:sldId id="263" r:id="rId7"/>
   </p:sldIdLst>
   <p:sldSz cx="9144000" cy="5143500" type="screen16x9"/>
   <p:notesSz cx="5143500" cy="9144000"/>
@@ -241,93 +242,9 @@
 </p:notesMaster>
 </file>
 
-<file path=ppt/notesSlides/notesSlide1.xml><?xml version="1.0" encoding="utf-8"?>
-<p:notes xmlns:a="http://schemas.openxmlformats.org/drawingml/2006/main" xmlns:r="http://schemas.openxmlformats.org/officeDocument/2006/relationships" xmlns:p="http://schemas.openxmlformats.org/presentationml/2006/main">
-  <p:cSld>
-    <p:spTree>
-      <p:nvGrpSpPr>
-        <p:cNvPr id="1" name=""/>
-        <p:cNvGrpSpPr/>
-        <p:nvPr/>
-      </p:nvGrpSpPr>
-      <p:grpSpPr>
-        <a:xfrm>
-          <a:off x="0" y="0"/>
-          <a:ext cx="0" cy="0"/>
-          <a:chOff x="0" y="0"/>
-          <a:chExt cx="0" cy="0"/>
-        </a:xfrm>
-      </p:grpSpPr>
-      <p:sp>
-        <p:nvSpPr>
-          <p:cNvPr id="2" name="Slide Image Placeholder 1"/>
-          <p:cNvSpPr>
-            <a:spLocks noGrp="1" noRot="1" noChangeAspect="1"/>
-          </p:cNvSpPr>
-          <p:nvPr>
-            <p:ph type="sldImg"/>
-          </p:nvPr>
-        </p:nvSpPr>
-        <p:spPr/>
-      </p:sp>
-      <p:sp>
-        <p:nvSpPr>
-          <p:cNvPr id="3" name="Notes Placeholder 2"/>
-          <p:cNvSpPr>
-            <a:spLocks noGrp="1"/>
-          </p:cNvSpPr>
-          <p:nvPr>
-            <p:ph type="body" idx="1"/>
-          </p:nvPr>
-        </p:nvSpPr>
-        <p:spPr/>
-        <p:txBody>
-          <a:bodyPr/>
-          <a:lstStyle/>
-          <a:p>
-            <a:endParaRPr lang="en-US" dirty="0"/>
-          </a:p>
-        </p:txBody>
-      </p:sp>
-      <p:sp>
-        <p:nvSpPr>
-          <p:cNvPr id="4" name="Slide Number Placeholder 3"/>
-          <p:cNvSpPr>
-            <a:spLocks noGrp="1"/>
-          </p:cNvSpPr>
-          <p:nvPr>
-            <p:ph type="sldNum" sz="quarter" idx="10"/>
-          </p:nvPr>
-        </p:nvSpPr>
-        <p:spPr/>
-        <p:txBody>
-          <a:bodyPr/>
-          <a:lstStyle/>
-          <a:p>
-            <a:fld id="{F7021451-1387-4CA6-816F-3879F97B5CBC}" type="slidenum">
-              <a:rPr lang="en-US"/>
-              <a:t>1</a:t>
-            </a:fld>
-            <a:endParaRPr lang="en-US"/>
-          </a:p>
-        </p:txBody>
-      </p:sp>
-    </p:spTree>
-    <p:extLst>
-      <p:ext uri="{BB962C8B-B14F-4D97-AF65-F5344CB8AC3E}">
-        <p14:creationId xmlns:p14="http://schemas.microsoft.com/office/powerpoint/2010/main" val="1024086991"/>
-      </p:ext>
-    </p:extLst>
-  </p:cSld>
-  <p:clrMapOvr>
-    <a:masterClrMapping/>
-  </p:clrMapOvr>
-</p:notes>
-</file>
-
 <file path=ppt/slideLayouts/slideLayout1.xml><?xml version="1.0" encoding="utf-8"?>
 <p:sldLayout xmlns:a="http://schemas.openxmlformats.org/drawingml/2006/main" xmlns:r="http://schemas.openxmlformats.org/officeDocument/2006/relationships" xmlns:p="http://schemas.openxmlformats.org/presentationml/2006/main" preserve="1">
-  <p:cSld name="DEFAULT">
+  <p:cSld name="Image Content">
     <p:bg>
       <p:bgRef idx="1001">
         <a:schemeClr val="bg1"/>
@@ -347,7 +264,1832 @@
           <a:chExt cx="0" cy="0"/>
         </a:xfrm>
       </p:grpSpPr>
+      <p:sp>
+        <p:nvSpPr>
+          <p:cNvPr id="2" name="CasellaDiTesto 1">
+            <a:extLst>
+              <a:ext uri="{FF2B5EF4-FFF2-40B4-BE49-F238E27FC236}">
+                <a16:creationId xmlns:a16="http://schemas.microsoft.com/office/drawing/2014/main" id="{BEF2A485-BE30-A66E-9173-707CE568EF43}"/>
+              </a:ext>
+            </a:extLst>
+          </p:cNvPr>
+          <p:cNvSpPr txBox="1"/>
+          <p:nvPr userDrawn="1"/>
+        </p:nvSpPr>
+        <p:spPr>
+          <a:xfrm>
+            <a:off x="508000" y="254000"/>
+            <a:ext cx="8229600" cy="457200"/>
+          </a:xfrm>
+          <a:prstGeom prst="rect">
+            <a:avLst/>
+          </a:prstGeom>
+          <a:noFill/>
+        </p:spPr>
+        <p:txBody>
+          <a:bodyPr vertOverflow="overflow" vert="horz" wrap="square" rtlCol="0" anchor="ctr" anchorCtr="0">
+            <a:noAutofit/>
+          </a:bodyPr>
+          <a:lstStyle/>
+          <a:p>
+            <a:pPr algn="l"/>
+            <a:r>
+              <a:rPr lang="it-IT" sz="2600" b="1" dirty="0">
+                <a:solidFill>
+                  <a:srgbClr val="1A1A1A"/>
+                </a:solidFill>
+                <a:latin typeface="Calibri"/>
+                <a:ea typeface="Calibri"/>
+                <a:cs typeface="Calibri"/>
+              </a:rPr>
+              <a:t>Slide Title</a:t>
+            </a:r>
+          </a:p>
+        </p:txBody>
+      </p:sp>
+      <p:sp>
+        <p:nvSpPr>
+          <p:cNvPr id="3" name="CasellaDiTesto 2">
+            <a:extLst>
+              <a:ext uri="{FF2B5EF4-FFF2-40B4-BE49-F238E27FC236}">
+                <a16:creationId xmlns:a16="http://schemas.microsoft.com/office/drawing/2014/main" id="{3BEDA1CF-C5AE-DD5B-9342-F610121D19B1}"/>
+              </a:ext>
+            </a:extLst>
+          </p:cNvPr>
+          <p:cNvSpPr txBox="1"/>
+          <p:nvPr userDrawn="1"/>
+        </p:nvSpPr>
+        <p:spPr>
+          <a:xfrm>
+            <a:off x="368300" y="914400"/>
+            <a:ext cx="4318000" cy="3492500"/>
+          </a:xfrm>
+          <a:prstGeom prst="rect">
+            <a:avLst/>
+          </a:prstGeom>
+          <a:noFill/>
+        </p:spPr>
+        <p:txBody>
+          <a:bodyPr vertOverflow="overflow" vert="horz" wrap="square" rtlCol="0" anchor="t">
+            <a:noAutofit/>
+          </a:bodyPr>
+          <a:lstStyle/>
+          <a:p>
+            <a:pPr algn="l"/>
+            <a:r>
+              <a:rPr lang="it-IT" sz="1600" dirty="0">
+                <a:solidFill>
+                  <a:srgbClr val="333333"/>
+                </a:solidFill>
+                <a:latin typeface="Calibri"/>
+                <a:ea typeface="Calibri"/>
+                <a:cs typeface="Calibri"/>
+              </a:rPr>
+              <a:t>Text </a:t>
+            </a:r>
+            <a:r>
+              <a:rPr lang="it-IT" sz="1600" dirty="0" err="1">
+                <a:solidFill>
+                  <a:srgbClr val="333333"/>
+                </a:solidFill>
+                <a:latin typeface="Calibri"/>
+                <a:ea typeface="Calibri"/>
+                <a:cs typeface="Calibri"/>
+              </a:rPr>
+              <a:t>content</a:t>
+            </a:r>
+            <a:r>
+              <a:rPr lang="it-IT" sz="1600" dirty="0">
+                <a:solidFill>
+                  <a:srgbClr val="333333"/>
+                </a:solidFill>
+                <a:latin typeface="Calibri"/>
+                <a:ea typeface="Calibri"/>
+                <a:cs typeface="Calibri"/>
+              </a:rPr>
+              <a:t> </a:t>
+            </a:r>
+            <a:r>
+              <a:rPr lang="it-IT" sz="1600" dirty="0" err="1">
+                <a:solidFill>
+                  <a:srgbClr val="333333"/>
+                </a:solidFill>
+                <a:latin typeface="Calibri"/>
+                <a:ea typeface="Calibri"/>
+                <a:cs typeface="Calibri"/>
+              </a:rPr>
+              <a:t>goes</a:t>
+            </a:r>
+            <a:r>
+              <a:rPr lang="it-IT" sz="1600" dirty="0">
+                <a:solidFill>
+                  <a:srgbClr val="333333"/>
+                </a:solidFill>
+                <a:latin typeface="Calibri"/>
+                <a:ea typeface="Calibri"/>
+                <a:cs typeface="Calibri"/>
+              </a:rPr>
+              <a:t> </a:t>
+            </a:r>
+            <a:r>
+              <a:rPr lang="it-IT" sz="1600" dirty="0" err="1">
+                <a:solidFill>
+                  <a:srgbClr val="333333"/>
+                </a:solidFill>
+                <a:latin typeface="Calibri"/>
+                <a:ea typeface="Calibri"/>
+                <a:cs typeface="Calibri"/>
+              </a:rPr>
+              <a:t>here</a:t>
+            </a:r>
+            <a:endParaRPr lang="it-IT" sz="1600" dirty="0">
+              <a:solidFill>
+                <a:srgbClr val="333333"/>
+              </a:solidFill>
+              <a:latin typeface="Calibri"/>
+              <a:ea typeface="Calibri"/>
+              <a:cs typeface="Calibri"/>
+            </a:endParaRPr>
+          </a:p>
+        </p:txBody>
+      </p:sp>
+      <p:sp>
+        <p:nvSpPr>
+          <p:cNvPr id="4" name="Rettangolo con angoli arrotondati 3">
+            <a:extLst>
+              <a:ext uri="{FF2B5EF4-FFF2-40B4-BE49-F238E27FC236}">
+                <a16:creationId xmlns:a16="http://schemas.microsoft.com/office/drawing/2014/main" id="{A4AC78B8-D2E8-8FD7-43EB-3F25868399E6}"/>
+              </a:ext>
+            </a:extLst>
+          </p:cNvPr>
+          <p:cNvSpPr/>
+          <p:nvPr userDrawn="1"/>
+        </p:nvSpPr>
+        <p:spPr>
+          <a:xfrm>
+            <a:off x="4889500" y="914400"/>
+            <a:ext cx="3937000" cy="3492500"/>
+          </a:xfrm>
+          <a:prstGeom prst="roundRect">
+            <a:avLst/>
+          </a:prstGeom>
+          <a:solidFill>
+            <a:srgbClr val="F0F0F0"/>
+          </a:solidFill>
+          <a:ln w="12700" cap="flat" cmpd="sng" algn="ctr">
+            <a:solidFill>
+              <a:srgbClr val="D6E4F0"/>
+            </a:solidFill>
+            <a:prstDash val="solid"/>
+            <a:miter lim="800000"/>
+          </a:ln>
+        </p:spPr>
+        <p:style>
+          <a:lnRef idx="2">
+            <a:schemeClr val="accent1">
+              <a:shade val="15000"/>
+            </a:schemeClr>
+          </a:lnRef>
+          <a:fillRef idx="1">
+            <a:schemeClr val="accent1"/>
+          </a:fillRef>
+          <a:effectRef idx="0">
+            <a:schemeClr val="accent1"/>
+          </a:effectRef>
+          <a:fontRef idx="minor">
+            <a:schemeClr val="lt1"/>
+          </a:fontRef>
+        </p:style>
+        <p:txBody>
+          <a:bodyPr vertOverflow="clip" horzOverflow="clip" rtlCol="0" anchor="ctr" anchorCtr="0">
+            <a:noAutofit/>
+          </a:bodyPr>
+          <a:lstStyle/>
+          <a:p>
+            <a:pPr algn="l"/>
+            <a:r>
+              <a:rPr lang="it-IT" sz="1600">
+                <a:solidFill>
+                  <a:srgbClr val="AAAAAA"/>
+                </a:solidFill>
+                <a:latin typeface="Calibri"/>
+                <a:ea typeface="Calibri"/>
+                <a:cs typeface="Calibri"/>
+              </a:rPr>
+              <a:t>Image / Chart</a:t>
+            </a:r>
+          </a:p>
+        </p:txBody>
+      </p:sp>
     </p:spTree>
+  </p:cSld>
+  <p:clrMapOvr>
+    <a:masterClrMapping/>
+  </p:clrMapOvr>
+</p:sldLayout>
+</file>
+
+<file path=ppt/slideLayouts/slideLayout2.xml><?xml version="1.0" encoding="utf-8"?>
+<p:sldLayout xmlns:a="http://schemas.openxmlformats.org/drawingml/2006/main" xmlns:r="http://schemas.openxmlformats.org/officeDocument/2006/relationships" xmlns:p="http://schemas.openxmlformats.org/presentationml/2006/main" preserve="1" userDrawn="1">
+  <p:cSld name="2 Columns Content">
+    <p:spTree>
+      <p:nvGrpSpPr>
+        <p:cNvPr id="1" name=""/>
+        <p:cNvGrpSpPr/>
+        <p:nvPr/>
+      </p:nvGrpSpPr>
+      <p:grpSpPr>
+        <a:xfrm>
+          <a:off x="0" y="0"/>
+          <a:ext cx="0" cy="0"/>
+          <a:chOff x="0" y="0"/>
+          <a:chExt cx="0" cy="0"/>
+        </a:xfrm>
+      </p:grpSpPr>
+      <p:sp>
+        <p:nvSpPr>
+          <p:cNvPr id="10" name="Accent Bar"/>
+          <p:cNvSpPr/>
+          <p:nvPr userDrawn="1"/>
+        </p:nvSpPr>
+        <p:spPr>
+          <a:xfrm>
+            <a:off x="317500" y="241300"/>
+            <a:ext cx="63500" cy="457200"/>
+          </a:xfrm>
+          <a:prstGeom prst="rect">
+            <a:avLst/>
+          </a:prstGeom>
+          <a:solidFill>
+            <a:srgbClr val="C8472C"/>
+          </a:solidFill>
+          <a:ln w="6350">
+            <a:solidFill>
+              <a:srgbClr val="C8472C"/>
+            </a:solidFill>
+          </a:ln>
+        </p:spPr>
+        <p:txBody>
+          <a:bodyPr/>
+          <a:lstStyle/>
+          <a:p>
+            <a:endParaRPr lang="en-US"/>
+          </a:p>
+        </p:txBody>
+      </p:sp>
+      <p:cxnSp>
+        <p:nvCxnSpPr>
+          <p:cNvPr id="11" name="Divider Line"/>
+          <p:cNvCxnSpPr/>
+          <p:nvPr userDrawn="1"/>
+        </p:nvCxnSpPr>
+        <p:spPr>
+          <a:xfrm>
+            <a:off x="317500" y="774700"/>
+            <a:ext cx="8509000" cy="0"/>
+          </a:xfrm>
+          <a:prstGeom prst="line">
+            <a:avLst/>
+          </a:prstGeom>
+          <a:ln w="12700">
+            <a:solidFill>
+              <a:srgbClr val="D6E4F0"/>
+            </a:solidFill>
+          </a:ln>
+        </p:spPr>
+      </p:cxnSp>
+      <p:sp>
+        <p:nvSpPr>
+          <p:cNvPr id="12" name="Footer Left"/>
+          <p:cNvSpPr txBox="1"/>
+          <p:nvPr userDrawn="1"/>
+        </p:nvSpPr>
+        <p:spPr>
+          <a:xfrm>
+            <a:off x="317500" y="4851400"/>
+            <a:ext cx="7772400" cy="203200"/>
+          </a:xfrm>
+          <a:prstGeom prst="rect">
+            <a:avLst/>
+          </a:prstGeom>
+          <a:noFill/>
+        </p:spPr>
+        <p:txBody>
+          <a:bodyPr wrap="square" lIns="0" tIns="0" rIns="0" bIns="0" anchor="ctr"/>
+          <a:lstStyle/>
+          <a:p>
+            <a:pPr algn="l"/>
+            <a:r>
+              <a:rPr lang="en-US" sz="900" dirty="0">
+                <a:solidFill>
+                  <a:srgbClr val="BBBBBB"/>
+                </a:solidFill>
+                <a:latin typeface="Calibri" pitchFamily="34" charset="0"/>
+              </a:rPr>
+              <a:t>Author  ·  Presentation Title</a:t>
+            </a:r>
+          </a:p>
+        </p:txBody>
+      </p:sp>
+      <p:sp>
+        <p:nvSpPr>
+          <p:cNvPr id="13" name="Footer Right"/>
+          <p:cNvSpPr txBox="1"/>
+          <p:nvPr userDrawn="1"/>
+        </p:nvSpPr>
+        <p:spPr>
+          <a:xfrm>
+            <a:off x="8407400" y="4851400"/>
+            <a:ext cx="457200" cy="203200"/>
+          </a:xfrm>
+          <a:prstGeom prst="rect">
+            <a:avLst/>
+          </a:prstGeom>
+          <a:noFill/>
+        </p:spPr>
+        <p:txBody>
+          <a:bodyPr wrap="square" lIns="0" tIns="0" rIns="0" bIns="0" anchor="ctr"/>
+          <a:lstStyle/>
+          <a:p>
+            <a:pPr algn="r"/>
+            <a:r>
+              <a:rPr lang="en-US" sz="900" dirty="0">
+                <a:solidFill>
+                  <a:srgbClr val="BBBBBB"/>
+                </a:solidFill>
+                <a:latin typeface="Calibri" pitchFamily="34" charset="0"/>
+              </a:rPr>
+              <a:t># / N</a:t>
+            </a:r>
+          </a:p>
+        </p:txBody>
+      </p:sp>
+      <p:pic>
+        <p:nvPicPr>
+          <p:cNvPr id="14" name="Unimore Logo"/>
+          <p:cNvPicPr>
+            <a:picLocks noChangeAspect="1"/>
+          </p:cNvPicPr>
+          <p:nvPr userDrawn="1"/>
+        </p:nvPicPr>
+        <p:blipFill>
+          <a:blip r:embed="rId2"/>
+          <a:stretch>
+            <a:fillRect/>
+          </a:stretch>
+        </p:blipFill>
+        <p:spPr>
+          <a:xfrm>
+            <a:off x="7442200" y="4572000"/>
+            <a:ext cx="1524000" cy="548640"/>
+          </a:xfrm>
+          <a:prstGeom prst="rect">
+            <a:avLst/>
+          </a:prstGeom>
+        </p:spPr>
+      </p:pic>
+      <p:sp>
+        <p:nvSpPr>
+          <p:cNvPr id="2" name="CasellaDiTesto 1">
+            <a:extLst>
+              <a:ext uri="{FF2B5EF4-FFF2-40B4-BE49-F238E27FC236}">
+                <a16:creationId xmlns:a16="http://schemas.microsoft.com/office/drawing/2014/main" id="{FF9179C6-E191-5331-8606-9480C7200249}"/>
+              </a:ext>
+            </a:extLst>
+          </p:cNvPr>
+          <p:cNvSpPr txBox="1"/>
+          <p:nvPr userDrawn="1"/>
+        </p:nvSpPr>
+        <p:spPr>
+          <a:xfrm>
+            <a:off x="508000" y="254000"/>
+            <a:ext cx="8229600" cy="457200"/>
+          </a:xfrm>
+          <a:prstGeom prst="rect">
+            <a:avLst/>
+          </a:prstGeom>
+          <a:noFill/>
+        </p:spPr>
+        <p:txBody>
+          <a:bodyPr vertOverflow="overflow" vert="horz" wrap="square" rtlCol="0" anchor="ctr" anchorCtr="0">
+            <a:noAutofit/>
+          </a:bodyPr>
+          <a:lstStyle/>
+          <a:p>
+            <a:pPr algn="l"/>
+            <a:r>
+              <a:rPr lang="it-IT" sz="2600" b="1" dirty="0">
+                <a:solidFill>
+                  <a:srgbClr val="1A1A1A"/>
+                </a:solidFill>
+                <a:latin typeface="Calibri"/>
+                <a:ea typeface="Calibri"/>
+                <a:cs typeface="Calibri"/>
+              </a:rPr>
+              <a:t>Slide Title</a:t>
+            </a:r>
+          </a:p>
+        </p:txBody>
+      </p:sp>
+      <p:sp>
+        <p:nvSpPr>
+          <p:cNvPr id="3" name="CasellaDiTesto 2">
+            <a:extLst>
+              <a:ext uri="{FF2B5EF4-FFF2-40B4-BE49-F238E27FC236}">
+                <a16:creationId xmlns:a16="http://schemas.microsoft.com/office/drawing/2014/main" id="{4B8496F5-498E-1F51-EE9E-F1CC505A6326}"/>
+              </a:ext>
+            </a:extLst>
+          </p:cNvPr>
+          <p:cNvSpPr txBox="1"/>
+          <p:nvPr userDrawn="1"/>
+        </p:nvSpPr>
+        <p:spPr>
+          <a:xfrm>
+            <a:off x="368300" y="914400"/>
+            <a:ext cx="4089400" cy="3556000"/>
+          </a:xfrm>
+          <a:prstGeom prst="rect">
+            <a:avLst/>
+          </a:prstGeom>
+          <a:noFill/>
+        </p:spPr>
+        <p:txBody>
+          <a:bodyPr vertOverflow="overflow" vert="horz" wrap="square" rtlCol="0" anchor="t">
+            <a:noAutofit/>
+          </a:bodyPr>
+          <a:lstStyle/>
+          <a:p>
+            <a:pPr algn="l"/>
+            <a:r>
+              <a:rPr lang="it-IT" sz="1600" dirty="0">
+                <a:solidFill>
+                  <a:srgbClr val="333333"/>
+                </a:solidFill>
+                <a:latin typeface="Calibri"/>
+                <a:ea typeface="Calibri"/>
+                <a:cs typeface="Calibri"/>
+              </a:rPr>
+              <a:t>Left </a:t>
+            </a:r>
+            <a:r>
+              <a:rPr lang="it-IT" sz="1600" dirty="0" err="1">
+                <a:solidFill>
+                  <a:srgbClr val="333333"/>
+                </a:solidFill>
+                <a:latin typeface="Calibri"/>
+                <a:ea typeface="Calibri"/>
+                <a:cs typeface="Calibri"/>
+              </a:rPr>
+              <a:t>content</a:t>
+            </a:r>
+            <a:endParaRPr lang="it-IT" sz="1600" dirty="0">
+              <a:solidFill>
+                <a:srgbClr val="333333"/>
+              </a:solidFill>
+              <a:latin typeface="Calibri"/>
+              <a:ea typeface="Calibri"/>
+              <a:cs typeface="Calibri"/>
+            </a:endParaRPr>
+          </a:p>
+        </p:txBody>
+      </p:sp>
+      <p:sp>
+        <p:nvSpPr>
+          <p:cNvPr id="4" name="CasellaDiTesto 3">
+            <a:extLst>
+              <a:ext uri="{FF2B5EF4-FFF2-40B4-BE49-F238E27FC236}">
+                <a16:creationId xmlns:a16="http://schemas.microsoft.com/office/drawing/2014/main" id="{AAEBC8E3-3772-3517-6D88-69F15F76D304}"/>
+              </a:ext>
+            </a:extLst>
+          </p:cNvPr>
+          <p:cNvSpPr txBox="1"/>
+          <p:nvPr userDrawn="1"/>
+        </p:nvSpPr>
+        <p:spPr>
+          <a:xfrm>
+            <a:off x="4699000" y="914400"/>
+            <a:ext cx="4089400" cy="3556000"/>
+          </a:xfrm>
+          <a:prstGeom prst="rect">
+            <a:avLst/>
+          </a:prstGeom>
+          <a:noFill/>
+        </p:spPr>
+        <p:txBody>
+          <a:bodyPr vertOverflow="overflow" vert="horz" wrap="square" rtlCol="0" anchor="t">
+            <a:noAutofit/>
+          </a:bodyPr>
+          <a:lstStyle/>
+          <a:p>
+            <a:pPr algn="l"/>
+            <a:r>
+              <a:rPr lang="it-IT" sz="1600">
+                <a:solidFill>
+                  <a:srgbClr val="333333"/>
+                </a:solidFill>
+                <a:latin typeface="Calibri"/>
+                <a:ea typeface="Calibri"/>
+                <a:cs typeface="Calibri"/>
+              </a:rPr>
+              <a:t>Right content</a:t>
+            </a:r>
+          </a:p>
+        </p:txBody>
+      </p:sp>
+    </p:spTree>
+  </p:cSld>
+  <p:clrMapOvr>
+    <a:masterClrMapping/>
+  </p:clrMapOvr>
+</p:sldLayout>
+</file>
+
+<file path=ppt/slideLayouts/slideLayout3.xml><?xml version="1.0" encoding="utf-8"?>
+<p:sldLayout xmlns:a="http://schemas.openxmlformats.org/drawingml/2006/main" xmlns:r="http://schemas.openxmlformats.org/officeDocument/2006/relationships" xmlns:p="http://schemas.openxmlformats.org/presentationml/2006/main" preserve="1" userDrawn="1">
+  <p:cSld name="Standard Content">
+    <p:spTree>
+      <p:nvGrpSpPr>
+        <p:cNvPr id="1" name=""/>
+        <p:cNvGrpSpPr/>
+        <p:nvPr/>
+      </p:nvGrpSpPr>
+      <p:grpSpPr>
+        <a:xfrm>
+          <a:off x="0" y="0"/>
+          <a:ext cx="0" cy="0"/>
+          <a:chOff x="0" y="0"/>
+          <a:chExt cx="0" cy="0"/>
+        </a:xfrm>
+      </p:grpSpPr>
+      <p:sp>
+        <p:nvSpPr>
+          <p:cNvPr id="10" name="Accent Bar"/>
+          <p:cNvSpPr/>
+          <p:nvPr userDrawn="1"/>
+        </p:nvSpPr>
+        <p:spPr>
+          <a:xfrm>
+            <a:off x="317500" y="241300"/>
+            <a:ext cx="63500" cy="457200"/>
+          </a:xfrm>
+          <a:prstGeom prst="rect">
+            <a:avLst/>
+          </a:prstGeom>
+          <a:solidFill>
+            <a:srgbClr val="C8472C"/>
+          </a:solidFill>
+          <a:ln w="6350">
+            <a:solidFill>
+              <a:srgbClr val="C8472C"/>
+            </a:solidFill>
+          </a:ln>
+        </p:spPr>
+        <p:txBody>
+          <a:bodyPr/>
+          <a:lstStyle/>
+          <a:p>
+            <a:endParaRPr lang="en-US"/>
+          </a:p>
+        </p:txBody>
+      </p:sp>
+      <p:cxnSp>
+        <p:nvCxnSpPr>
+          <p:cNvPr id="11" name="Divider Line"/>
+          <p:cNvCxnSpPr/>
+          <p:nvPr userDrawn="1"/>
+        </p:nvCxnSpPr>
+        <p:spPr>
+          <a:xfrm>
+            <a:off x="317500" y="774700"/>
+            <a:ext cx="8509000" cy="0"/>
+          </a:xfrm>
+          <a:prstGeom prst="line">
+            <a:avLst/>
+          </a:prstGeom>
+          <a:ln w="12700">
+            <a:solidFill>
+              <a:srgbClr val="D6E4F0"/>
+            </a:solidFill>
+          </a:ln>
+        </p:spPr>
+      </p:cxnSp>
+      <p:sp>
+        <p:nvSpPr>
+          <p:cNvPr id="12" name="Footer Left"/>
+          <p:cNvSpPr txBox="1"/>
+          <p:nvPr userDrawn="1"/>
+        </p:nvSpPr>
+        <p:spPr>
+          <a:xfrm>
+            <a:off x="317500" y="4851400"/>
+            <a:ext cx="7772400" cy="203200"/>
+          </a:xfrm>
+          <a:prstGeom prst="rect">
+            <a:avLst/>
+          </a:prstGeom>
+          <a:noFill/>
+        </p:spPr>
+        <p:txBody>
+          <a:bodyPr wrap="square" lIns="0" tIns="0" rIns="0" bIns="0" anchor="ctr"/>
+          <a:lstStyle/>
+          <a:p>
+            <a:pPr algn="l"/>
+            <a:r>
+              <a:rPr lang="en-US" sz="900" dirty="0">
+                <a:solidFill>
+                  <a:srgbClr val="BBBBBB"/>
+                </a:solidFill>
+                <a:latin typeface="Calibri" pitchFamily="34" charset="0"/>
+              </a:rPr>
+              <a:t>Author  ·  Presentation Title</a:t>
+            </a:r>
+          </a:p>
+        </p:txBody>
+      </p:sp>
+      <p:sp>
+        <p:nvSpPr>
+          <p:cNvPr id="13" name="Footer Right"/>
+          <p:cNvSpPr txBox="1"/>
+          <p:nvPr userDrawn="1"/>
+        </p:nvSpPr>
+        <p:spPr>
+          <a:xfrm>
+            <a:off x="8407400" y="4851400"/>
+            <a:ext cx="457200" cy="203200"/>
+          </a:xfrm>
+          <a:prstGeom prst="rect">
+            <a:avLst/>
+          </a:prstGeom>
+          <a:noFill/>
+        </p:spPr>
+        <p:txBody>
+          <a:bodyPr wrap="square" lIns="0" tIns="0" rIns="0" bIns="0" anchor="ctr"/>
+          <a:lstStyle/>
+          <a:p>
+            <a:pPr algn="r"/>
+            <a:r>
+              <a:rPr lang="en-US" sz="900" dirty="0">
+                <a:solidFill>
+                  <a:srgbClr val="BBBBBB"/>
+                </a:solidFill>
+                <a:latin typeface="Calibri" pitchFamily="34" charset="0"/>
+              </a:rPr>
+              <a:t># / N</a:t>
+            </a:r>
+          </a:p>
+        </p:txBody>
+      </p:sp>
+      <p:pic>
+        <p:nvPicPr>
+          <p:cNvPr id="14" name="Unimore Logo"/>
+          <p:cNvPicPr>
+            <a:picLocks noChangeAspect="1"/>
+          </p:cNvPicPr>
+          <p:nvPr userDrawn="1"/>
+        </p:nvPicPr>
+        <p:blipFill>
+          <a:blip r:embed="rId2"/>
+          <a:stretch>
+            <a:fillRect/>
+          </a:stretch>
+        </p:blipFill>
+        <p:spPr>
+          <a:xfrm>
+            <a:off x="7442200" y="4572000"/>
+            <a:ext cx="1524000" cy="548640"/>
+          </a:xfrm>
+          <a:prstGeom prst="rect">
+            <a:avLst/>
+          </a:prstGeom>
+        </p:spPr>
+      </p:pic>
+      <p:sp>
+        <p:nvSpPr>
+          <p:cNvPr id="2" name="CasellaDiTesto 1">
+            <a:extLst>
+              <a:ext uri="{FF2B5EF4-FFF2-40B4-BE49-F238E27FC236}">
+                <a16:creationId xmlns:a16="http://schemas.microsoft.com/office/drawing/2014/main" id="{2BA9E8BA-4469-EAFF-B7DA-097873334163}"/>
+              </a:ext>
+            </a:extLst>
+          </p:cNvPr>
+          <p:cNvSpPr txBox="1"/>
+          <p:nvPr userDrawn="1"/>
+        </p:nvSpPr>
+        <p:spPr>
+          <a:xfrm>
+            <a:off x="508000" y="254000"/>
+            <a:ext cx="8229600" cy="457200"/>
+          </a:xfrm>
+          <a:prstGeom prst="rect">
+            <a:avLst/>
+          </a:prstGeom>
+          <a:noFill/>
+        </p:spPr>
+        <p:txBody>
+          <a:bodyPr vertOverflow="overflow" vert="horz" wrap="square" rtlCol="0" anchor="ctr" anchorCtr="0">
+            <a:noAutofit/>
+          </a:bodyPr>
+          <a:lstStyle/>
+          <a:p>
+            <a:pPr algn="l"/>
+            <a:r>
+              <a:rPr lang="it-IT" sz="2600" b="1" dirty="0">
+                <a:solidFill>
+                  <a:srgbClr val="1A1A1A"/>
+                </a:solidFill>
+                <a:latin typeface="Calibri"/>
+                <a:ea typeface="Calibri"/>
+                <a:cs typeface="Calibri"/>
+              </a:rPr>
+              <a:t>Slide Title</a:t>
+            </a:r>
+          </a:p>
+        </p:txBody>
+      </p:sp>
+      <p:sp>
+        <p:nvSpPr>
+          <p:cNvPr id="3" name="CasellaDiTesto 2">
+            <a:extLst>
+              <a:ext uri="{FF2B5EF4-FFF2-40B4-BE49-F238E27FC236}">
+                <a16:creationId xmlns:a16="http://schemas.microsoft.com/office/drawing/2014/main" id="{BCE73FEE-4442-63E7-F583-7C5268138838}"/>
+              </a:ext>
+            </a:extLst>
+          </p:cNvPr>
+          <p:cNvSpPr txBox="1"/>
+          <p:nvPr userDrawn="1"/>
+        </p:nvSpPr>
+        <p:spPr>
+          <a:xfrm>
+            <a:off x="368300" y="914400"/>
+            <a:ext cx="8382000" cy="3556000"/>
+          </a:xfrm>
+          <a:prstGeom prst="rect">
+            <a:avLst/>
+          </a:prstGeom>
+          <a:noFill/>
+        </p:spPr>
+        <p:txBody>
+          <a:bodyPr vertOverflow="overflow" vert="horz" wrap="square" rtlCol="0" anchor="t">
+            <a:noAutofit/>
+          </a:bodyPr>
+          <a:lstStyle/>
+          <a:p>
+            <a:pPr algn="l"/>
+            <a:r>
+              <a:rPr lang="it-IT" sz="1600" dirty="0">
+                <a:solidFill>
+                  <a:srgbClr val="333333"/>
+                </a:solidFill>
+                <a:latin typeface="Calibri"/>
+                <a:ea typeface="Calibri"/>
+                <a:cs typeface="Calibri"/>
+              </a:rPr>
+              <a:t>Content </a:t>
+            </a:r>
+            <a:r>
+              <a:rPr lang="it-IT" sz="1600" dirty="0" err="1">
+                <a:solidFill>
+                  <a:srgbClr val="333333"/>
+                </a:solidFill>
+                <a:latin typeface="Calibri"/>
+                <a:ea typeface="Calibri"/>
+                <a:cs typeface="Calibri"/>
+              </a:rPr>
+              <a:t>goes</a:t>
+            </a:r>
+            <a:r>
+              <a:rPr lang="it-IT" sz="1600" dirty="0">
+                <a:solidFill>
+                  <a:srgbClr val="333333"/>
+                </a:solidFill>
+                <a:latin typeface="Calibri"/>
+                <a:ea typeface="Calibri"/>
+                <a:cs typeface="Calibri"/>
+              </a:rPr>
+              <a:t> </a:t>
+            </a:r>
+            <a:r>
+              <a:rPr lang="it-IT" sz="1600" dirty="0" err="1">
+                <a:solidFill>
+                  <a:srgbClr val="333333"/>
+                </a:solidFill>
+                <a:latin typeface="Calibri"/>
+                <a:ea typeface="Calibri"/>
+                <a:cs typeface="Calibri"/>
+              </a:rPr>
+              <a:t>here</a:t>
+            </a:r>
+            <a:endParaRPr lang="it-IT" sz="1600" dirty="0">
+              <a:solidFill>
+                <a:srgbClr val="333333"/>
+              </a:solidFill>
+              <a:latin typeface="Calibri"/>
+              <a:ea typeface="Calibri"/>
+              <a:cs typeface="Calibri"/>
+            </a:endParaRPr>
+          </a:p>
+        </p:txBody>
+      </p:sp>
+    </p:spTree>
+    <p:extLst>
+      <p:ext uri="{BB962C8B-B14F-4D97-AF65-F5344CB8AC3E}">
+        <p14:creationId xmlns:p14="http://schemas.microsoft.com/office/powerpoint/2010/main" val="3586401087"/>
+      </p:ext>
+    </p:extLst>
+  </p:cSld>
+  <p:clrMapOvr>
+    <a:masterClrMapping/>
+  </p:clrMapOvr>
+</p:sldLayout>
+</file>
+
+<file path=ppt/slideLayouts/slideLayout4.xml><?xml version="1.0" encoding="utf-8"?>
+<p:sldLayout xmlns:a="http://schemas.openxmlformats.org/drawingml/2006/main" xmlns:r="http://schemas.openxmlformats.org/officeDocument/2006/relationships" xmlns:p="http://schemas.openxmlformats.org/presentationml/2006/main" preserve="1" userDrawn="1">
+  <p:cSld name="Frontespizio">
+    <p:bg>
+      <p:bgPr>
+        <a:solidFill>
+          <a:srgbClr val="1A2E4A"/>
+        </a:solidFill>
+        <a:effectLst/>
+      </p:bgPr>
+    </p:bg>
+    <p:spTree>
+      <p:nvGrpSpPr>
+        <p:cNvPr id="1" name=""/>
+        <p:cNvGrpSpPr/>
+        <p:nvPr/>
+      </p:nvGrpSpPr>
+      <p:grpSpPr>
+        <a:xfrm>
+          <a:off x="0" y="0"/>
+          <a:ext cx="0" cy="0"/>
+          <a:chOff x="0" y="0"/>
+          <a:chExt cx="0" cy="0"/>
+        </a:xfrm>
+      </p:grpSpPr>
+      <p:sp>
+        <p:nvSpPr>
+          <p:cNvPr id="8" name="Shape 0">
+            <a:extLst>
+              <a:ext uri="{FF2B5EF4-FFF2-40B4-BE49-F238E27FC236}">
+                <a16:creationId xmlns:a16="http://schemas.microsoft.com/office/drawing/2014/main" id="{526605BC-B1CA-2824-D924-78A259FD846E}"/>
+              </a:ext>
+            </a:extLst>
+          </p:cNvPr>
+          <p:cNvSpPr/>
+          <p:nvPr userDrawn="1"/>
+        </p:nvSpPr>
+        <p:spPr>
+          <a:xfrm>
+            <a:off x="457200" y="932688"/>
+            <a:ext cx="8229600" cy="0"/>
+          </a:xfrm>
+          <a:prstGeom prst="line">
+            <a:avLst/>
+          </a:prstGeom>
+          <a:noFill/>
+          <a:ln w="25400">
+            <a:solidFill>
+              <a:srgbClr val="C8472C"/>
+            </a:solidFill>
+            <a:prstDash val="solid"/>
+          </a:ln>
+        </p:spPr>
+      </p:sp>
+      <p:sp>
+        <p:nvSpPr>
+          <p:cNvPr id="9" name="Text 1">
+            <a:extLst>
+              <a:ext uri="{FF2B5EF4-FFF2-40B4-BE49-F238E27FC236}">
+                <a16:creationId xmlns:a16="http://schemas.microsoft.com/office/drawing/2014/main" id="{8B3960F7-6679-4E91-A84F-9A6E20A7E879}"/>
+              </a:ext>
+            </a:extLst>
+          </p:cNvPr>
+          <p:cNvSpPr/>
+          <p:nvPr userDrawn="1"/>
+        </p:nvSpPr>
+        <p:spPr>
+          <a:xfrm>
+            <a:off x="457200" y="1005840"/>
+            <a:ext cx="8229600" cy="274320"/>
+          </a:xfrm>
+          <a:prstGeom prst="rect">
+            <a:avLst/>
+          </a:prstGeom>
+          <a:noFill/>
+          <a:ln/>
+        </p:spPr>
+        <p:txBody>
+          <a:bodyPr wrap="square" rtlCol="0" anchor="ctr"/>
+          <a:lstStyle/>
+          <a:p>
+            <a:pPr marL="0" indent="0" algn="ctr">
+              <a:buNone/>
+            </a:pPr>
+            <a:r>
+              <a:rPr lang="en-US" sz="1200" b="1" dirty="0">
+                <a:solidFill>
+                  <a:srgbClr val="CADCFC"/>
+                </a:solidFill>
+                <a:latin typeface="Calibri" pitchFamily="34" charset="0"/>
+                <a:ea typeface="Calibri" pitchFamily="34" charset="-122"/>
+                <a:cs typeface="Calibri" pitchFamily="34" charset="-120"/>
+              </a:rPr>
+              <a:t>Dipartimento di Scienze e Metodi dell'Ingegneria</a:t>
+            </a:r>
+            <a:endParaRPr lang="en-US" sz="1200" dirty="0"/>
+          </a:p>
+        </p:txBody>
+      </p:sp>
+      <p:sp>
+        <p:nvSpPr>
+          <p:cNvPr id="10" name="Text 2">
+            <a:extLst>
+              <a:ext uri="{FF2B5EF4-FFF2-40B4-BE49-F238E27FC236}">
+                <a16:creationId xmlns:a16="http://schemas.microsoft.com/office/drawing/2014/main" id="{03386294-E84F-C730-9131-561C7C53D31D}"/>
+              </a:ext>
+            </a:extLst>
+          </p:cNvPr>
+          <p:cNvSpPr/>
+          <p:nvPr userDrawn="1"/>
+        </p:nvSpPr>
+        <p:spPr>
+          <a:xfrm>
+            <a:off x="457200" y="1280160"/>
+            <a:ext cx="8229600" cy="256032"/>
+          </a:xfrm>
+          <a:prstGeom prst="rect">
+            <a:avLst/>
+          </a:prstGeom>
+          <a:noFill/>
+          <a:ln/>
+        </p:spPr>
+        <p:txBody>
+          <a:bodyPr wrap="square" rtlCol="0" anchor="ctr"/>
+          <a:lstStyle/>
+          <a:p>
+            <a:pPr marL="0" indent="0" algn="ctr">
+              <a:buNone/>
+            </a:pPr>
+            <a:r>
+              <a:rPr lang="en-US" sz="1100" i="1" dirty="0">
+                <a:solidFill>
+                  <a:srgbClr val="9DB8D4"/>
+                </a:solidFill>
+                <a:latin typeface="Calibri" pitchFamily="34" charset="0"/>
+                <a:ea typeface="Calibri" pitchFamily="34" charset="-122"/>
+                <a:cs typeface="Calibri" pitchFamily="34" charset="-120"/>
+              </a:rPr>
+              <a:t>Corso di Laurea Magistrale in Digital Automation Engineering</a:t>
+            </a:r>
+            <a:endParaRPr lang="en-US" sz="1100" dirty="0"/>
+          </a:p>
+        </p:txBody>
+      </p:sp>
+      <p:sp>
+        <p:nvSpPr>
+          <p:cNvPr id="11" name="Text 3">
+            <a:extLst>
+              <a:ext uri="{FF2B5EF4-FFF2-40B4-BE49-F238E27FC236}">
+                <a16:creationId xmlns:a16="http://schemas.microsoft.com/office/drawing/2014/main" id="{3848A098-266E-562A-29D8-DAABDE0F7325}"/>
+              </a:ext>
+            </a:extLst>
+          </p:cNvPr>
+          <p:cNvSpPr/>
+          <p:nvPr userDrawn="1"/>
+        </p:nvSpPr>
+        <p:spPr>
+          <a:xfrm>
+            <a:off x="457200" y="1627632"/>
+            <a:ext cx="8229600" cy="1417320"/>
+          </a:xfrm>
+          <a:prstGeom prst="rect">
+            <a:avLst/>
+          </a:prstGeom>
+          <a:noFill/>
+          <a:ln/>
+        </p:spPr>
+        <p:txBody>
+          <a:bodyPr wrap="square" rtlCol="0" anchor="ctr"/>
+          <a:lstStyle/>
+          <a:p>
+            <a:pPr marL="0" indent="0" algn="ctr">
+              <a:buNone/>
+            </a:pPr>
+            <a:r>
+              <a:rPr lang="en-US" sz="3000" b="1" dirty="0">
+                <a:solidFill>
+                  <a:srgbClr val="FFFFFF"/>
+                </a:solidFill>
+                <a:latin typeface="Calibri" pitchFamily="34" charset="0"/>
+                <a:ea typeface="Calibri" pitchFamily="34" charset="-122"/>
+                <a:cs typeface="Calibri" pitchFamily="34" charset="-120"/>
+              </a:rPr>
+              <a:t>Deep Reinforcement Learning in</a:t>
+            </a:r>
+            <a:endParaRPr lang="en-US" sz="3000" dirty="0"/>
+          </a:p>
+          <a:p>
+            <a:pPr marL="0" indent="0" algn="ctr">
+              <a:buNone/>
+            </a:pPr>
+            <a:r>
+              <a:rPr lang="en-US" sz="3000" b="1" dirty="0">
+                <a:solidFill>
+                  <a:srgbClr val="FFFFFF"/>
+                </a:solidFill>
+                <a:latin typeface="Calibri" pitchFamily="34" charset="0"/>
+                <a:ea typeface="Calibri" pitchFamily="34" charset="-122"/>
+                <a:cs typeface="Calibri" pitchFamily="34" charset="-120"/>
+              </a:rPr>
+              <a:t>Frontier-Based Autonomous Exploration</a:t>
+            </a:r>
+            <a:endParaRPr lang="en-US" sz="3000" dirty="0"/>
+          </a:p>
+        </p:txBody>
+      </p:sp>
+      <p:sp>
+        <p:nvSpPr>
+          <p:cNvPr id="12" name="Shape 4">
+            <a:extLst>
+              <a:ext uri="{FF2B5EF4-FFF2-40B4-BE49-F238E27FC236}">
+                <a16:creationId xmlns:a16="http://schemas.microsoft.com/office/drawing/2014/main" id="{2E5DF3F4-DC6A-CE9A-EDB9-15A7CF474C32}"/>
+              </a:ext>
+            </a:extLst>
+          </p:cNvPr>
+          <p:cNvSpPr/>
+          <p:nvPr userDrawn="1"/>
+        </p:nvSpPr>
+        <p:spPr>
+          <a:xfrm>
+            <a:off x="2286000" y="3127248"/>
+            <a:ext cx="4572000" cy="0"/>
+          </a:xfrm>
+          <a:prstGeom prst="line">
+            <a:avLst/>
+          </a:prstGeom>
+          <a:noFill/>
+          <a:ln w="19050">
+            <a:solidFill>
+              <a:srgbClr val="C8472C"/>
+            </a:solidFill>
+            <a:prstDash val="solid"/>
+          </a:ln>
+        </p:spPr>
+      </p:sp>
+      <p:sp>
+        <p:nvSpPr>
+          <p:cNvPr id="13" name="Text 5">
+            <a:extLst>
+              <a:ext uri="{FF2B5EF4-FFF2-40B4-BE49-F238E27FC236}">
+                <a16:creationId xmlns:a16="http://schemas.microsoft.com/office/drawing/2014/main" id="{6A2E1985-9F70-66FA-81B8-88C111D3CAD1}"/>
+              </a:ext>
+            </a:extLst>
+          </p:cNvPr>
+          <p:cNvSpPr/>
+          <p:nvPr userDrawn="1"/>
+        </p:nvSpPr>
+        <p:spPr>
+          <a:xfrm>
+            <a:off x="914400" y="3246120"/>
+            <a:ext cx="7315200" cy="292608"/>
+          </a:xfrm>
+          <a:prstGeom prst="rect">
+            <a:avLst/>
+          </a:prstGeom>
+          <a:noFill/>
+          <a:ln/>
+        </p:spPr>
+        <p:txBody>
+          <a:bodyPr wrap="square" rtlCol="0" anchor="ctr"/>
+          <a:lstStyle/>
+          <a:p>
+            <a:pPr marL="0" indent="0" algn="l">
+              <a:buNone/>
+            </a:pPr>
+            <a:r>
+              <a:rPr lang="en-US" sz="1200" dirty="0">
+                <a:solidFill>
+                  <a:srgbClr val="9DB8D4"/>
+                </a:solidFill>
+                <a:latin typeface="Calibri" pitchFamily="34" charset="0"/>
+                <a:ea typeface="Calibri" pitchFamily="34" charset="-122"/>
+                <a:cs typeface="Calibri" pitchFamily="34" charset="-120"/>
+              </a:rPr>
+              <a:t>Tesi di Laurea di:  </a:t>
+            </a:r>
+            <a:r>
+              <a:rPr lang="en-US" sz="1200" b="1" dirty="0">
+                <a:solidFill>
+                  <a:srgbClr val="FFFFFF"/>
+                </a:solidFill>
+                <a:latin typeface="Calibri" pitchFamily="34" charset="0"/>
+                <a:ea typeface="Calibri" pitchFamily="34" charset="-122"/>
+                <a:cs typeface="Calibri" pitchFamily="34" charset="-120"/>
+              </a:rPr>
+              <a:t>Paolo Spallanzani</a:t>
+            </a:r>
+            <a:endParaRPr lang="en-US" sz="1200" dirty="0"/>
+          </a:p>
+        </p:txBody>
+      </p:sp>
+      <p:sp>
+        <p:nvSpPr>
+          <p:cNvPr id="14" name="Text 6">
+            <a:extLst>
+              <a:ext uri="{FF2B5EF4-FFF2-40B4-BE49-F238E27FC236}">
+                <a16:creationId xmlns:a16="http://schemas.microsoft.com/office/drawing/2014/main" id="{6FF24EB2-1FCF-68A9-7B8B-012D729A0F8C}"/>
+              </a:ext>
+            </a:extLst>
+          </p:cNvPr>
+          <p:cNvSpPr/>
+          <p:nvPr userDrawn="1"/>
+        </p:nvSpPr>
+        <p:spPr>
+          <a:xfrm>
+            <a:off x="914400" y="3566160"/>
+            <a:ext cx="7315200" cy="274320"/>
+          </a:xfrm>
+          <a:prstGeom prst="rect">
+            <a:avLst/>
+          </a:prstGeom>
+          <a:noFill/>
+          <a:ln/>
+        </p:spPr>
+        <p:txBody>
+          <a:bodyPr wrap="square" rtlCol="0" anchor="ctr"/>
+          <a:lstStyle/>
+          <a:p>
+            <a:pPr marL="0" indent="0">
+              <a:buNone/>
+            </a:pPr>
+            <a:r>
+              <a:rPr lang="en-US" sz="1100" dirty="0">
+                <a:solidFill>
+                  <a:srgbClr val="9DB8D4"/>
+                </a:solidFill>
+                <a:latin typeface="Calibri" pitchFamily="34" charset="0"/>
+                <a:ea typeface="Calibri" pitchFamily="34" charset="-122"/>
+                <a:cs typeface="Calibri" pitchFamily="34" charset="-120"/>
+              </a:rPr>
+              <a:t>Relatore:  </a:t>
+            </a:r>
+            <a:r>
+              <a:rPr lang="en-US" sz="1100" b="1" dirty="0">
+                <a:solidFill>
+                  <a:srgbClr val="FFFFFF"/>
+                </a:solidFill>
+                <a:latin typeface="Calibri" pitchFamily="34" charset="0"/>
+                <a:ea typeface="Calibri" pitchFamily="34" charset="-122"/>
+                <a:cs typeface="Calibri" pitchFamily="34" charset="-120"/>
+              </a:rPr>
+              <a:t>Prof. Lorenzo Sabattini</a:t>
+            </a:r>
+            <a:endParaRPr lang="en-US" sz="1100" dirty="0"/>
+          </a:p>
+        </p:txBody>
+      </p:sp>
+      <p:sp>
+        <p:nvSpPr>
+          <p:cNvPr id="15" name="Text 7">
+            <a:extLst>
+              <a:ext uri="{FF2B5EF4-FFF2-40B4-BE49-F238E27FC236}">
+                <a16:creationId xmlns:a16="http://schemas.microsoft.com/office/drawing/2014/main" id="{D378B1E1-7B7F-E3BB-F19F-235818FCA12C}"/>
+              </a:ext>
+            </a:extLst>
+          </p:cNvPr>
+          <p:cNvSpPr/>
+          <p:nvPr userDrawn="1"/>
+        </p:nvSpPr>
+        <p:spPr>
+          <a:xfrm>
+            <a:off x="914400" y="3858768"/>
+            <a:ext cx="7315200" cy="274320"/>
+          </a:xfrm>
+          <a:prstGeom prst="rect">
+            <a:avLst/>
+          </a:prstGeom>
+          <a:noFill/>
+          <a:ln/>
+        </p:spPr>
+        <p:txBody>
+          <a:bodyPr wrap="square" rtlCol="0" anchor="ctr"/>
+          <a:lstStyle/>
+          <a:p>
+            <a:pPr marL="0" indent="0">
+              <a:buNone/>
+            </a:pPr>
+            <a:r>
+              <a:rPr lang="en-US" sz="1100" dirty="0">
+                <a:solidFill>
+                  <a:srgbClr val="9DB8D4"/>
+                </a:solidFill>
+                <a:latin typeface="Calibri" pitchFamily="34" charset="0"/>
+                <a:ea typeface="Calibri" pitchFamily="34" charset="-122"/>
+                <a:cs typeface="Calibri" pitchFamily="34" charset="-120"/>
+              </a:rPr>
+              <a:t>Correlatori:  </a:t>
+            </a:r>
+            <a:r>
+              <a:rPr lang="en-US" sz="1100" b="1" dirty="0">
+                <a:solidFill>
+                  <a:srgbClr val="FFFFFF"/>
+                </a:solidFill>
+                <a:latin typeface="Calibri" pitchFamily="34" charset="0"/>
+                <a:ea typeface="Calibri" pitchFamily="34" charset="-122"/>
+                <a:cs typeface="Calibri" pitchFamily="34" charset="-120"/>
+              </a:rPr>
+              <a:t>Dott. Mattia Catellani  ·  Dott. Mattia Mantovani</a:t>
+            </a:r>
+            <a:endParaRPr lang="en-US" sz="1100" dirty="0"/>
+          </a:p>
+        </p:txBody>
+      </p:sp>
+      <p:sp>
+        <p:nvSpPr>
+          <p:cNvPr id="16" name="Text 8">
+            <a:extLst>
+              <a:ext uri="{FF2B5EF4-FFF2-40B4-BE49-F238E27FC236}">
+                <a16:creationId xmlns:a16="http://schemas.microsoft.com/office/drawing/2014/main" id="{78AB9DC9-608E-C372-DFAB-74DA8DA9FE8C}"/>
+              </a:ext>
+            </a:extLst>
+          </p:cNvPr>
+          <p:cNvSpPr/>
+          <p:nvPr userDrawn="1"/>
+        </p:nvSpPr>
+        <p:spPr>
+          <a:xfrm>
+            <a:off x="457200" y="4526280"/>
+            <a:ext cx="8229600" cy="256032"/>
+          </a:xfrm>
+          <a:prstGeom prst="rect">
+            <a:avLst/>
+          </a:prstGeom>
+          <a:noFill/>
+          <a:ln/>
+        </p:spPr>
+        <p:txBody>
+          <a:bodyPr wrap="square" rtlCol="0" anchor="ctr"/>
+          <a:lstStyle/>
+          <a:p>
+            <a:pPr marL="0" indent="0" algn="ctr">
+              <a:buNone/>
+            </a:pPr>
+            <a:r>
+              <a:rPr lang="en-US" sz="1000" dirty="0">
+                <a:solidFill>
+                  <a:srgbClr val="9DB8D4"/>
+                </a:solidFill>
+                <a:latin typeface="Calibri" pitchFamily="34" charset="0"/>
+                <a:ea typeface="Calibri" pitchFamily="34" charset="-122"/>
+                <a:cs typeface="Calibri" pitchFamily="34" charset="-120"/>
+              </a:rPr>
+              <a:t>Anno Accademico 2024/2025</a:t>
+            </a:r>
+            <a:endParaRPr lang="en-US" sz="1000" dirty="0"/>
+          </a:p>
+        </p:txBody>
+      </p:sp>
+      <p:pic>
+        <p:nvPicPr>
+          <p:cNvPr id="17" name="Immagine 16">
+            <a:extLst>
+              <a:ext uri="{FF2B5EF4-FFF2-40B4-BE49-F238E27FC236}">
+                <a16:creationId xmlns:a16="http://schemas.microsoft.com/office/drawing/2014/main" id="{08122842-6C81-70B2-D7B4-07F57673DC43}"/>
+              </a:ext>
+            </a:extLst>
+          </p:cNvPr>
+          <p:cNvPicPr>
+            <a:picLocks noChangeAspect="1"/>
+          </p:cNvPicPr>
+          <p:nvPr userDrawn="1"/>
+        </p:nvPicPr>
+        <p:blipFill>
+          <a:blip r:embed="rId2"/>
+          <a:stretch>
+            <a:fillRect/>
+          </a:stretch>
+        </p:blipFill>
+        <p:spPr>
+          <a:xfrm>
+            <a:off x="457200" y="114300"/>
+            <a:ext cx="2019300" cy="726948"/>
+          </a:xfrm>
+          <a:prstGeom prst="rect">
+            <a:avLst/>
+          </a:prstGeom>
+        </p:spPr>
+      </p:pic>
+    </p:spTree>
+    <p:extLst>
+      <p:ext uri="{BB962C8B-B14F-4D97-AF65-F5344CB8AC3E}">
+        <p14:creationId xmlns:p14="http://schemas.microsoft.com/office/powerpoint/2010/main" val="3107780332"/>
+      </p:ext>
+    </p:extLst>
+  </p:cSld>
+  <p:clrMapOvr>
+    <a:masterClrMapping/>
+  </p:clrMapOvr>
+</p:sldLayout>
+</file>
+
+<file path=ppt/slideLayouts/slideLayout5.xml><?xml version="1.0" encoding="utf-8"?>
+<p:sldLayout xmlns:a="http://schemas.openxmlformats.org/drawingml/2006/main" xmlns:r="http://schemas.openxmlformats.org/officeDocument/2006/relationships" xmlns:p="http://schemas.openxmlformats.org/presentationml/2006/main" preserve="1" userDrawn="1">
+  <p:cSld name="Layout personalizzato">
+    <p:spTree>
+      <p:nvGrpSpPr>
+        <p:cNvPr id="1" name=""/>
+        <p:cNvGrpSpPr/>
+        <p:nvPr/>
+      </p:nvGrpSpPr>
+      <p:grpSpPr>
+        <a:xfrm>
+          <a:off x="0" y="0"/>
+          <a:ext cx="0" cy="0"/>
+          <a:chOff x="0" y="0"/>
+          <a:chExt cx="0" cy="0"/>
+        </a:xfrm>
+      </p:grpSpPr>
+      <p:sp>
+        <p:nvSpPr>
+          <p:cNvPr id="17" name="Text 0">
+            <a:extLst>
+              <a:ext uri="{FF2B5EF4-FFF2-40B4-BE49-F238E27FC236}">
+                <a16:creationId xmlns:a16="http://schemas.microsoft.com/office/drawing/2014/main" id="{EE330B32-3708-D315-1AD0-A10B738A23FC}"/>
+              </a:ext>
+            </a:extLst>
+          </p:cNvPr>
+          <p:cNvSpPr/>
+          <p:nvPr userDrawn="1"/>
+        </p:nvSpPr>
+        <p:spPr>
+          <a:xfrm>
+            <a:off x="457200" y="228600"/>
+            <a:ext cx="8229600" cy="548640"/>
+          </a:xfrm>
+          <a:prstGeom prst="rect">
+            <a:avLst/>
+          </a:prstGeom>
+          <a:noFill/>
+          <a:ln/>
+        </p:spPr>
+        <p:txBody>
+          <a:bodyPr wrap="square" rtlCol="0" anchor="ctr"/>
+          <a:lstStyle/>
+          <a:p>
+            <a:pPr marL="0" indent="0" algn="l">
+              <a:buNone/>
+            </a:pPr>
+            <a:r>
+              <a:rPr lang="en-US" sz="3200" b="1" dirty="0">
+                <a:solidFill>
+                  <a:srgbClr val="FFFFFF"/>
+                </a:solidFill>
+                <a:latin typeface="Calibri" pitchFamily="34" charset="0"/>
+                <a:ea typeface="Calibri" pitchFamily="34" charset="-122"/>
+                <a:cs typeface="Calibri" pitchFamily="34" charset="-120"/>
+              </a:rPr>
+              <a:t>Conclusions</a:t>
+            </a:r>
+            <a:endParaRPr lang="en-US" sz="3200" dirty="0"/>
+          </a:p>
+        </p:txBody>
+      </p:sp>
+      <p:sp>
+        <p:nvSpPr>
+          <p:cNvPr id="18" name="Shape 1">
+            <a:extLst>
+              <a:ext uri="{FF2B5EF4-FFF2-40B4-BE49-F238E27FC236}">
+                <a16:creationId xmlns:a16="http://schemas.microsoft.com/office/drawing/2014/main" id="{DF7A45D1-2CC8-6EAA-4EE8-FFE68F18D781}"/>
+              </a:ext>
+            </a:extLst>
+          </p:cNvPr>
+          <p:cNvSpPr/>
+          <p:nvPr userDrawn="1"/>
+        </p:nvSpPr>
+        <p:spPr>
+          <a:xfrm>
+            <a:off x="457200" y="841248"/>
+            <a:ext cx="8229600" cy="0"/>
+          </a:xfrm>
+          <a:prstGeom prst="line">
+            <a:avLst/>
+          </a:prstGeom>
+          <a:noFill/>
+          <a:ln w="25400">
+            <a:solidFill>
+              <a:srgbClr val="C8472C"/>
+            </a:solidFill>
+            <a:prstDash val="solid"/>
+          </a:ln>
+        </p:spPr>
+      </p:sp>
+      <p:sp>
+        <p:nvSpPr>
+          <p:cNvPr id="19" name="Shape 2">
+            <a:extLst>
+              <a:ext uri="{FF2B5EF4-FFF2-40B4-BE49-F238E27FC236}">
+                <a16:creationId xmlns:a16="http://schemas.microsoft.com/office/drawing/2014/main" id="{04D00198-E4B5-30CC-0027-A0984F44BB91}"/>
+              </a:ext>
+            </a:extLst>
+          </p:cNvPr>
+          <p:cNvSpPr/>
+          <p:nvPr userDrawn="1"/>
+        </p:nvSpPr>
+        <p:spPr>
+          <a:xfrm>
+            <a:off x="411480" y="987552"/>
+            <a:ext cx="256032" cy="256032"/>
+          </a:xfrm>
+          <a:prstGeom prst="ellipse">
+            <a:avLst/>
+          </a:prstGeom>
+          <a:solidFill>
+            <a:srgbClr val="C8472C"/>
+          </a:solidFill>
+          <a:ln w="12700">
+            <a:solidFill>
+              <a:srgbClr val="C8472C"/>
+            </a:solidFill>
+            <a:prstDash val="solid"/>
+          </a:ln>
+        </p:spPr>
+      </p:sp>
+      <p:sp>
+        <p:nvSpPr>
+          <p:cNvPr id="20" name="Text 3">
+            <a:extLst>
+              <a:ext uri="{FF2B5EF4-FFF2-40B4-BE49-F238E27FC236}">
+                <a16:creationId xmlns:a16="http://schemas.microsoft.com/office/drawing/2014/main" id="{66251E09-D0A7-09EF-126D-18A49BAD8201}"/>
+              </a:ext>
+            </a:extLst>
+          </p:cNvPr>
+          <p:cNvSpPr/>
+          <p:nvPr userDrawn="1"/>
+        </p:nvSpPr>
+        <p:spPr>
+          <a:xfrm>
+            <a:off x="804672" y="969264"/>
+            <a:ext cx="8001000" cy="384048"/>
+          </a:xfrm>
+          <a:prstGeom prst="rect">
+            <a:avLst/>
+          </a:prstGeom>
+          <a:noFill/>
+          <a:ln/>
+        </p:spPr>
+        <p:txBody>
+          <a:bodyPr wrap="square" rtlCol="0" anchor="ctr"/>
+          <a:lstStyle/>
+          <a:p>
+            <a:pPr marL="0" indent="0">
+              <a:buNone/>
+            </a:pPr>
+            <a:endParaRPr lang="en-US" sz="1300" dirty="0"/>
+          </a:p>
+        </p:txBody>
+      </p:sp>
+      <p:sp>
+        <p:nvSpPr>
+          <p:cNvPr id="21" name="Shape 4">
+            <a:extLst>
+              <a:ext uri="{FF2B5EF4-FFF2-40B4-BE49-F238E27FC236}">
+                <a16:creationId xmlns:a16="http://schemas.microsoft.com/office/drawing/2014/main" id="{BCE28362-0855-98A7-16B7-F75AE5519E10}"/>
+              </a:ext>
+            </a:extLst>
+          </p:cNvPr>
+          <p:cNvSpPr/>
+          <p:nvPr userDrawn="1"/>
+        </p:nvSpPr>
+        <p:spPr>
+          <a:xfrm>
+            <a:off x="411480" y="1746504"/>
+            <a:ext cx="256032" cy="256032"/>
+          </a:xfrm>
+          <a:prstGeom prst="ellipse">
+            <a:avLst/>
+          </a:prstGeom>
+          <a:solidFill>
+            <a:srgbClr val="C8472C"/>
+          </a:solidFill>
+          <a:ln w="12700">
+            <a:solidFill>
+              <a:srgbClr val="C8472C"/>
+            </a:solidFill>
+            <a:prstDash val="solid"/>
+          </a:ln>
+        </p:spPr>
+      </p:sp>
+      <p:sp>
+        <p:nvSpPr>
+          <p:cNvPr id="22" name="Text 5">
+            <a:extLst>
+              <a:ext uri="{FF2B5EF4-FFF2-40B4-BE49-F238E27FC236}">
+                <a16:creationId xmlns:a16="http://schemas.microsoft.com/office/drawing/2014/main" id="{7B564588-27F1-D454-BF49-C741BEA540C9}"/>
+              </a:ext>
+            </a:extLst>
+          </p:cNvPr>
+          <p:cNvSpPr/>
+          <p:nvPr userDrawn="1"/>
+        </p:nvSpPr>
+        <p:spPr>
+          <a:xfrm>
+            <a:off x="804672" y="1728216"/>
+            <a:ext cx="8001000" cy="384048"/>
+          </a:xfrm>
+          <a:prstGeom prst="rect">
+            <a:avLst/>
+          </a:prstGeom>
+          <a:noFill/>
+          <a:ln/>
+        </p:spPr>
+        <p:txBody>
+          <a:bodyPr wrap="square" rtlCol="0" anchor="ctr"/>
+          <a:lstStyle/>
+          <a:p>
+            <a:pPr marL="0" indent="0">
+              <a:buNone/>
+            </a:pPr>
+            <a:endParaRPr lang="en-US" sz="1300" dirty="0"/>
+          </a:p>
+        </p:txBody>
+      </p:sp>
+      <p:sp>
+        <p:nvSpPr>
+          <p:cNvPr id="23" name="Shape 6">
+            <a:extLst>
+              <a:ext uri="{FF2B5EF4-FFF2-40B4-BE49-F238E27FC236}">
+                <a16:creationId xmlns:a16="http://schemas.microsoft.com/office/drawing/2014/main" id="{96D9CEE5-12B4-61A5-95C1-FFCA89560187}"/>
+              </a:ext>
+            </a:extLst>
+          </p:cNvPr>
+          <p:cNvSpPr/>
+          <p:nvPr userDrawn="1"/>
+        </p:nvSpPr>
+        <p:spPr>
+          <a:xfrm>
+            <a:off x="411480" y="2505456"/>
+            <a:ext cx="256032" cy="256032"/>
+          </a:xfrm>
+          <a:prstGeom prst="ellipse">
+            <a:avLst/>
+          </a:prstGeom>
+          <a:solidFill>
+            <a:srgbClr val="C8472C"/>
+          </a:solidFill>
+          <a:ln w="12700">
+            <a:solidFill>
+              <a:srgbClr val="C8472C"/>
+            </a:solidFill>
+            <a:prstDash val="solid"/>
+          </a:ln>
+        </p:spPr>
+      </p:sp>
+      <p:sp>
+        <p:nvSpPr>
+          <p:cNvPr id="24" name="Text 7">
+            <a:extLst>
+              <a:ext uri="{FF2B5EF4-FFF2-40B4-BE49-F238E27FC236}">
+                <a16:creationId xmlns:a16="http://schemas.microsoft.com/office/drawing/2014/main" id="{AEADAF4D-B287-58F6-10FB-B193BEA40212}"/>
+              </a:ext>
+            </a:extLst>
+          </p:cNvPr>
+          <p:cNvSpPr/>
+          <p:nvPr userDrawn="1"/>
+        </p:nvSpPr>
+        <p:spPr>
+          <a:xfrm>
+            <a:off x="804672" y="2487168"/>
+            <a:ext cx="8001000" cy="384048"/>
+          </a:xfrm>
+          <a:prstGeom prst="rect">
+            <a:avLst/>
+          </a:prstGeom>
+          <a:noFill/>
+          <a:ln/>
+        </p:spPr>
+        <p:txBody>
+          <a:bodyPr wrap="square" rtlCol="0" anchor="ctr"/>
+          <a:lstStyle/>
+          <a:p>
+            <a:pPr marL="0" indent="0">
+              <a:buNone/>
+            </a:pPr>
+            <a:endParaRPr lang="en-US" sz="1300" dirty="0"/>
+          </a:p>
+        </p:txBody>
+      </p:sp>
+      <p:sp>
+        <p:nvSpPr>
+          <p:cNvPr id="25" name="Shape 8">
+            <a:extLst>
+              <a:ext uri="{FF2B5EF4-FFF2-40B4-BE49-F238E27FC236}">
+                <a16:creationId xmlns:a16="http://schemas.microsoft.com/office/drawing/2014/main" id="{4F86E7D2-0ACE-BA99-BABB-0EFACD1BC9A2}"/>
+              </a:ext>
+            </a:extLst>
+          </p:cNvPr>
+          <p:cNvSpPr/>
+          <p:nvPr userDrawn="1"/>
+        </p:nvSpPr>
+        <p:spPr>
+          <a:xfrm>
+            <a:off x="411480" y="3264408"/>
+            <a:ext cx="256032" cy="256032"/>
+          </a:xfrm>
+          <a:prstGeom prst="ellipse">
+            <a:avLst/>
+          </a:prstGeom>
+          <a:solidFill>
+            <a:srgbClr val="C8472C"/>
+          </a:solidFill>
+          <a:ln w="12700">
+            <a:solidFill>
+              <a:srgbClr val="C8472C"/>
+            </a:solidFill>
+            <a:prstDash val="solid"/>
+          </a:ln>
+        </p:spPr>
+      </p:sp>
+      <p:sp>
+        <p:nvSpPr>
+          <p:cNvPr id="26" name="Text 9">
+            <a:extLst>
+              <a:ext uri="{FF2B5EF4-FFF2-40B4-BE49-F238E27FC236}">
+                <a16:creationId xmlns:a16="http://schemas.microsoft.com/office/drawing/2014/main" id="{61C44422-0542-B493-5AA1-72C50929A1CD}"/>
+              </a:ext>
+            </a:extLst>
+          </p:cNvPr>
+          <p:cNvSpPr/>
+          <p:nvPr userDrawn="1"/>
+        </p:nvSpPr>
+        <p:spPr>
+          <a:xfrm>
+            <a:off x="804672" y="3246120"/>
+            <a:ext cx="8001000" cy="384048"/>
+          </a:xfrm>
+          <a:prstGeom prst="rect">
+            <a:avLst/>
+          </a:prstGeom>
+          <a:noFill/>
+          <a:ln/>
+        </p:spPr>
+        <p:txBody>
+          <a:bodyPr wrap="square" rtlCol="0" anchor="ctr"/>
+          <a:lstStyle/>
+          <a:p>
+            <a:pPr marL="0" indent="0">
+              <a:buNone/>
+            </a:pPr>
+            <a:endParaRPr lang="en-US" sz="1300" dirty="0"/>
+          </a:p>
+        </p:txBody>
+      </p:sp>
+      <p:sp>
+        <p:nvSpPr>
+          <p:cNvPr id="27" name="Shape 10">
+            <a:extLst>
+              <a:ext uri="{FF2B5EF4-FFF2-40B4-BE49-F238E27FC236}">
+                <a16:creationId xmlns:a16="http://schemas.microsoft.com/office/drawing/2014/main" id="{970F9DB6-EB9F-417B-DA46-3CB83AC24A2D}"/>
+              </a:ext>
+            </a:extLst>
+          </p:cNvPr>
+          <p:cNvSpPr/>
+          <p:nvPr userDrawn="1"/>
+        </p:nvSpPr>
+        <p:spPr>
+          <a:xfrm>
+            <a:off x="411480" y="4023360"/>
+            <a:ext cx="256032" cy="256032"/>
+          </a:xfrm>
+          <a:prstGeom prst="ellipse">
+            <a:avLst/>
+          </a:prstGeom>
+          <a:solidFill>
+            <a:srgbClr val="C8472C"/>
+          </a:solidFill>
+          <a:ln w="12700">
+            <a:solidFill>
+              <a:srgbClr val="C8472C"/>
+            </a:solidFill>
+            <a:prstDash val="solid"/>
+          </a:ln>
+        </p:spPr>
+      </p:sp>
+      <p:sp>
+        <p:nvSpPr>
+          <p:cNvPr id="28" name="Text 11">
+            <a:extLst>
+              <a:ext uri="{FF2B5EF4-FFF2-40B4-BE49-F238E27FC236}">
+                <a16:creationId xmlns:a16="http://schemas.microsoft.com/office/drawing/2014/main" id="{8CC124B3-CAC5-60F2-E867-12843D61BF32}"/>
+              </a:ext>
+            </a:extLst>
+          </p:cNvPr>
+          <p:cNvSpPr/>
+          <p:nvPr userDrawn="1"/>
+        </p:nvSpPr>
+        <p:spPr>
+          <a:xfrm>
+            <a:off x="804672" y="4005072"/>
+            <a:ext cx="8001000" cy="384048"/>
+          </a:xfrm>
+          <a:prstGeom prst="rect">
+            <a:avLst/>
+          </a:prstGeom>
+          <a:noFill/>
+          <a:ln/>
+        </p:spPr>
+        <p:txBody>
+          <a:bodyPr wrap="square" rtlCol="0" anchor="ctr"/>
+          <a:lstStyle/>
+          <a:p>
+            <a:pPr marL="0" indent="0">
+              <a:buNone/>
+            </a:pPr>
+            <a:endParaRPr lang="en-US" sz="1300" dirty="0"/>
+          </a:p>
+        </p:txBody>
+      </p:sp>
+      <p:sp>
+        <p:nvSpPr>
+          <p:cNvPr id="29" name="Shape 12">
+            <a:extLst>
+              <a:ext uri="{FF2B5EF4-FFF2-40B4-BE49-F238E27FC236}">
+                <a16:creationId xmlns:a16="http://schemas.microsoft.com/office/drawing/2014/main" id="{E7DCE628-96A6-38EF-ED31-21BF2C7F90DF}"/>
+              </a:ext>
+            </a:extLst>
+          </p:cNvPr>
+          <p:cNvSpPr/>
+          <p:nvPr userDrawn="1"/>
+        </p:nvSpPr>
+        <p:spPr>
+          <a:xfrm>
+            <a:off x="457200" y="4773168"/>
+            <a:ext cx="8229600" cy="0"/>
+          </a:xfrm>
+          <a:prstGeom prst="line">
+            <a:avLst/>
+          </a:prstGeom>
+          <a:noFill/>
+          <a:ln w="19050">
+            <a:solidFill>
+              <a:srgbClr val="C8472C"/>
+            </a:solidFill>
+            <a:prstDash val="solid"/>
+          </a:ln>
+        </p:spPr>
+      </p:sp>
+      <p:sp>
+        <p:nvSpPr>
+          <p:cNvPr id="30" name="Text 13">
+            <a:extLst>
+              <a:ext uri="{FF2B5EF4-FFF2-40B4-BE49-F238E27FC236}">
+                <a16:creationId xmlns:a16="http://schemas.microsoft.com/office/drawing/2014/main" id="{304A07CA-B3AE-32F3-F8DC-F730D43B2C6A}"/>
+              </a:ext>
+            </a:extLst>
+          </p:cNvPr>
+          <p:cNvSpPr/>
+          <p:nvPr userDrawn="1"/>
+        </p:nvSpPr>
+        <p:spPr>
+          <a:xfrm>
+            <a:off x="457200" y="4809744"/>
+            <a:ext cx="8229600" cy="256032"/>
+          </a:xfrm>
+          <a:prstGeom prst="rect">
+            <a:avLst/>
+          </a:prstGeom>
+          <a:noFill/>
+          <a:ln/>
+        </p:spPr>
+        <p:txBody>
+          <a:bodyPr wrap="square" rtlCol="0" anchor="ctr"/>
+          <a:lstStyle/>
+          <a:p>
+            <a:pPr marL="0" indent="0" algn="ctr">
+              <a:buNone/>
+            </a:pPr>
+            <a:r>
+              <a:rPr lang="en-US" sz="1000" dirty="0">
+                <a:solidFill>
+                  <a:srgbClr val="9DB8D4"/>
+                </a:solidFill>
+                <a:latin typeface="Calibri" pitchFamily="34" charset="0"/>
+                <a:ea typeface="Calibri" pitchFamily="34" charset="-122"/>
+                <a:cs typeface="Calibri" pitchFamily="34" charset="-120"/>
+              </a:rPr>
+              <a:t>Paolo Spallanzani  ·  Università degli Studi di Modena e Reggio Emilia  ·  A.A. 2024/2025</a:t>
+            </a:r>
+            <a:endParaRPr lang="en-US" sz="1000" dirty="0"/>
+          </a:p>
+        </p:txBody>
+      </p:sp>
+    </p:spTree>
+    <p:extLst>
+      <p:ext uri="{BB962C8B-B14F-4D97-AF65-F5344CB8AC3E}">
+        <p14:creationId xmlns:p14="http://schemas.microsoft.com/office/powerpoint/2010/main" val="832347059"/>
+      </p:ext>
+    </p:extLst>
   </p:cSld>
   <p:clrMapOvr>
     <a:masterClrMapping/>
@@ -377,11 +2119,228 @@
           <a:chExt cx="0" cy="0"/>
         </a:xfrm>
       </p:grpSpPr>
+      <p:sp>
+        <p:nvSpPr>
+          <p:cNvPr id="2" name="Accent Bar">
+            <a:extLst>
+              <a:ext uri="{FF2B5EF4-FFF2-40B4-BE49-F238E27FC236}">
+                <a16:creationId xmlns:a16="http://schemas.microsoft.com/office/drawing/2014/main" id="{11F4AAE2-3933-200D-370A-2C7E2052F542}"/>
+              </a:ext>
+            </a:extLst>
+          </p:cNvPr>
+          <p:cNvSpPr/>
+          <p:nvPr userDrawn="1"/>
+        </p:nvSpPr>
+        <p:spPr>
+          <a:xfrm>
+            <a:off x="317500" y="241300"/>
+            <a:ext cx="63500" cy="457200"/>
+          </a:xfrm>
+          <a:prstGeom prst="rect">
+            <a:avLst/>
+          </a:prstGeom>
+          <a:solidFill>
+            <a:srgbClr val="C8472C"/>
+          </a:solidFill>
+          <a:ln w="6350">
+            <a:solidFill>
+              <a:srgbClr val="C8472C"/>
+            </a:solidFill>
+          </a:ln>
+        </p:spPr>
+        <p:txBody>
+          <a:bodyPr/>
+          <a:lstStyle/>
+          <a:p>
+            <a:endParaRPr lang="en-US" u="sng"/>
+          </a:p>
+        </p:txBody>
+      </p:sp>
+      <p:cxnSp>
+        <p:nvCxnSpPr>
+          <p:cNvPr id="3" name="Divider Line">
+            <a:extLst>
+              <a:ext uri="{FF2B5EF4-FFF2-40B4-BE49-F238E27FC236}">
+                <a16:creationId xmlns:a16="http://schemas.microsoft.com/office/drawing/2014/main" id="{224E6E87-85A6-72B6-8700-CF61C824351F}"/>
+              </a:ext>
+            </a:extLst>
+          </p:cNvPr>
+          <p:cNvCxnSpPr/>
+          <p:nvPr userDrawn="1"/>
+        </p:nvCxnSpPr>
+        <p:spPr>
+          <a:xfrm>
+            <a:off x="317500" y="774700"/>
+            <a:ext cx="8509000" cy="0"/>
+          </a:xfrm>
+          <a:prstGeom prst="line">
+            <a:avLst/>
+          </a:prstGeom>
+          <a:ln w="12700">
+            <a:solidFill>
+              <a:srgbClr val="D6E4F0"/>
+            </a:solidFill>
+          </a:ln>
+        </p:spPr>
+      </p:cxnSp>
+      <p:sp>
+        <p:nvSpPr>
+          <p:cNvPr id="4" name="Footer Left">
+            <a:extLst>
+              <a:ext uri="{FF2B5EF4-FFF2-40B4-BE49-F238E27FC236}">
+                <a16:creationId xmlns:a16="http://schemas.microsoft.com/office/drawing/2014/main" id="{FB136CB4-7A22-1793-524D-2BE9EE009B75}"/>
+              </a:ext>
+            </a:extLst>
+          </p:cNvPr>
+          <p:cNvSpPr txBox="1"/>
+          <p:nvPr userDrawn="1"/>
+        </p:nvSpPr>
+        <p:spPr>
+          <a:xfrm>
+            <a:off x="317500" y="4851400"/>
+            <a:ext cx="7772400" cy="203200"/>
+          </a:xfrm>
+          <a:prstGeom prst="rect">
+            <a:avLst/>
+          </a:prstGeom>
+          <a:noFill/>
+        </p:spPr>
+        <p:txBody>
+          <a:bodyPr wrap="square" lIns="0" tIns="0" rIns="0" bIns="0" anchor="ctr"/>
+          <a:lstStyle/>
+          <a:p>
+            <a:pPr algn="l"/>
+            <a:r>
+              <a:rPr lang="en-US" sz="900" u="sng" dirty="0">
+                <a:solidFill>
+                  <a:srgbClr val="BBBBBB"/>
+                </a:solidFill>
+                <a:latin typeface="Calibri" pitchFamily="34" charset="0"/>
+              </a:rPr>
+              <a:t>Author  ·  Presentation Title</a:t>
+            </a:r>
+          </a:p>
+        </p:txBody>
+      </p:sp>
+      <p:sp>
+        <p:nvSpPr>
+          <p:cNvPr id="5" name="Footer Right">
+            <a:extLst>
+              <a:ext uri="{FF2B5EF4-FFF2-40B4-BE49-F238E27FC236}">
+                <a16:creationId xmlns:a16="http://schemas.microsoft.com/office/drawing/2014/main" id="{EF21B7CF-5BA7-ABF9-4C5C-74174F8E0668}"/>
+              </a:ext>
+            </a:extLst>
+          </p:cNvPr>
+          <p:cNvSpPr txBox="1"/>
+          <p:nvPr userDrawn="1"/>
+        </p:nvSpPr>
+        <p:spPr>
+          <a:xfrm>
+            <a:off x="8407400" y="4851400"/>
+            <a:ext cx="457200" cy="203200"/>
+          </a:xfrm>
+          <a:prstGeom prst="rect">
+            <a:avLst/>
+          </a:prstGeom>
+          <a:noFill/>
+        </p:spPr>
+        <p:txBody>
+          <a:bodyPr wrap="square" lIns="0" tIns="0" rIns="0" bIns="0" anchor="ctr"/>
+          <a:lstStyle/>
+          <a:p>
+            <a:pPr algn="r"/>
+            <a:r>
+              <a:rPr lang="en-US" sz="900" u="sng" dirty="0">
+                <a:solidFill>
+                  <a:srgbClr val="BBBBBB"/>
+                </a:solidFill>
+                <a:latin typeface="Calibri" pitchFamily="34" charset="0"/>
+              </a:rPr>
+              <a:t># / N</a:t>
+            </a:r>
+          </a:p>
+        </p:txBody>
+      </p:sp>
+      <p:pic>
+        <p:nvPicPr>
+          <p:cNvPr id="6" name="Unimore Logo">
+            <a:extLst>
+              <a:ext uri="{FF2B5EF4-FFF2-40B4-BE49-F238E27FC236}">
+                <a16:creationId xmlns:a16="http://schemas.microsoft.com/office/drawing/2014/main" id="{6043A221-5444-D27B-415A-2EBF79EB34EC}"/>
+              </a:ext>
+            </a:extLst>
+          </p:cNvPr>
+          <p:cNvPicPr>
+            <a:picLocks noChangeAspect="1"/>
+          </p:cNvPicPr>
+          <p:nvPr userDrawn="1"/>
+        </p:nvPicPr>
+        <p:blipFill>
+          <a:blip r:embed="rId5"/>
+          <a:stretch>
+            <a:fillRect/>
+          </a:stretch>
+        </p:blipFill>
+        <p:spPr>
+          <a:xfrm>
+            <a:off x="7442200" y="4572000"/>
+            <a:ext cx="1524000" cy="548640"/>
+          </a:xfrm>
+          <a:prstGeom prst="rect">
+            <a:avLst/>
+          </a:prstGeom>
+        </p:spPr>
+      </p:pic>
+      <p:sp>
+        <p:nvSpPr>
+          <p:cNvPr id="10" name="CasellaDiTesto 9">
+            <a:extLst>
+              <a:ext uri="{FF2B5EF4-FFF2-40B4-BE49-F238E27FC236}">
+                <a16:creationId xmlns:a16="http://schemas.microsoft.com/office/drawing/2014/main" id="{6B349FC4-DBA0-AE5C-FDC3-9CDE9869F941}"/>
+              </a:ext>
+            </a:extLst>
+          </p:cNvPr>
+          <p:cNvSpPr txBox="1"/>
+          <p:nvPr userDrawn="1"/>
+        </p:nvSpPr>
+        <p:spPr>
+          <a:xfrm>
+            <a:off x="508000" y="254000"/>
+            <a:ext cx="8229600" cy="457200"/>
+          </a:xfrm>
+          <a:prstGeom prst="rect">
+            <a:avLst/>
+          </a:prstGeom>
+          <a:noFill/>
+        </p:spPr>
+        <p:txBody>
+          <a:bodyPr vertOverflow="overflow" vert="horz" wrap="square" rtlCol="0" anchor="ctr" anchorCtr="0">
+            <a:noAutofit/>
+          </a:bodyPr>
+          <a:lstStyle/>
+          <a:p>
+            <a:pPr algn="l"/>
+            <a:r>
+              <a:rPr lang="it-IT" sz="2600" b="1" dirty="0">
+                <a:solidFill>
+                  <a:srgbClr val="1A1A1A"/>
+                </a:solidFill>
+                <a:latin typeface="Calibri"/>
+                <a:ea typeface="Calibri"/>
+                <a:cs typeface="Calibri"/>
+              </a:rPr>
+              <a:t>Slide Title</a:t>
+            </a:r>
+          </a:p>
+        </p:txBody>
+      </p:sp>
     </p:spTree>
   </p:cSld>
   <p:clrMap bg1="lt1" tx1="dk1" bg2="lt2" tx2="dk2" accent1="accent1" accent2="accent2" accent3="accent3" accent4="accent4" accent5="accent5" accent6="accent6" hlink="hlink" folHlink="folHlink"/>
   <p:sldLayoutIdLst>
-    <p:sldLayoutId id="2147483649" r:id="rId1"/>
+    <p:sldLayoutId id="2147483652" r:id="rId1"/>
+    <p:sldLayoutId id="2147483650" r:id="rId2"/>
+    <p:sldLayoutId id="2147483654" r:id="rId3"/>
   </p:sldLayoutIdLst>
   <p:hf sldNum="0" hdr="0" ftr="0" dt="0"/>
   <p:txStyles>
@@ -637,9 +2596,9 @@
 </p:sldMaster>
 </file>
 
-<file path=ppt/slides/slide1.xml><?xml version="1.0" encoding="utf-8"?>
-<p:sld xmlns:a="http://schemas.openxmlformats.org/drawingml/2006/main" xmlns:r="http://schemas.openxmlformats.org/officeDocument/2006/relationships" xmlns:p="http://schemas.openxmlformats.org/presentationml/2006/main">
-  <p:cSld name="Slide 1">
+<file path=ppt/slideMasters/slideMaster2.xml><?xml version="1.0" encoding="utf-8"?>
+<p:sldMaster xmlns:a="http://schemas.openxmlformats.org/drawingml/2006/main" xmlns:r="http://schemas.openxmlformats.org/officeDocument/2006/relationships" xmlns:p="http://schemas.openxmlformats.org/presentationml/2006/main" preserve="1">
+  <p:cSld>
     <p:bg>
       <p:bgPr>
         <a:solidFill>
@@ -662,400 +2621,324 @@
           <a:chExt cx="0" cy="0"/>
         </a:xfrm>
       </p:grpSpPr>
-      <p:pic>
-        <p:nvPicPr>
-          <p:cNvPr id="2" name="Image 0" descr="/home/claude/assets/logo_unimore.png"/>
-          <p:cNvPicPr>
-            <a:picLocks noChangeAspect="1"/>
-          </p:cNvPicPr>
-          <p:nvPr/>
-        </p:nvPicPr>
-        <p:blipFill>
-          <a:blip r:embed="rId3"/>
-          <a:stretch>
-            <a:fillRect/>
-          </a:stretch>
-        </p:blipFill>
-        <p:spPr>
-          <a:xfrm>
-            <a:off x="457200" y="201168"/>
-            <a:ext cx="2743200" cy="621792"/>
-          </a:xfrm>
-          <a:prstGeom prst="rect">
-            <a:avLst/>
-          </a:prstGeom>
-        </p:spPr>
-      </p:pic>
-      <p:sp>
-        <p:nvSpPr>
-          <p:cNvPr id="3" name="Shape 0"/>
-          <p:cNvSpPr/>
-          <p:nvPr/>
-        </p:nvSpPr>
-        <p:spPr>
-          <a:xfrm>
-            <a:off x="457200" y="932688"/>
-            <a:ext cx="8229600" cy="0"/>
-          </a:xfrm>
-          <a:prstGeom prst="line">
-            <a:avLst/>
-          </a:prstGeom>
-          <a:noFill/>
-          <a:ln w="25400">
-            <a:solidFill>
-              <a:srgbClr val="C8472C"/>
-            </a:solidFill>
-            <a:prstDash val="solid"/>
-          </a:ln>
-        </p:spPr>
-      </p:sp>
-      <p:sp>
-        <p:nvSpPr>
-          <p:cNvPr id="4" name="Text 1"/>
-          <p:cNvSpPr/>
-          <p:nvPr/>
-        </p:nvSpPr>
-        <p:spPr>
-          <a:xfrm>
-            <a:off x="457200" y="1005840"/>
-            <a:ext cx="8229600" cy="274320"/>
-          </a:xfrm>
-          <a:prstGeom prst="rect">
-            <a:avLst/>
-          </a:prstGeom>
-          <a:noFill/>
-          <a:ln/>
-        </p:spPr>
-        <p:txBody>
-          <a:bodyPr wrap="square" rtlCol="0" anchor="ctr"/>
-          <a:lstStyle/>
-          <a:p>
-            <a:pPr marL="0" indent="0" algn="ctr">
-              <a:buNone/>
-            </a:pPr>
-            <a:r>
-              <a:rPr lang="en-US" sz="1200" b="1" dirty="0">
-                <a:solidFill>
-                  <a:srgbClr val="CADCFC"/>
-                </a:solidFill>
-                <a:latin typeface="Calibri" pitchFamily="34" charset="0"/>
-                <a:ea typeface="Calibri" pitchFamily="34" charset="-122"/>
-                <a:cs typeface="Calibri" pitchFamily="34" charset="-120"/>
-              </a:rPr>
-              <a:t>Dipartimento di Scienze e Metodi dell'Ingegneria</a:t>
-            </a:r>
-            <a:endParaRPr lang="en-US" sz="1200" dirty="0"/>
-          </a:p>
-        </p:txBody>
-      </p:sp>
-      <p:sp>
-        <p:nvSpPr>
-          <p:cNvPr id="5" name="Text 2"/>
-          <p:cNvSpPr/>
-          <p:nvPr/>
-        </p:nvSpPr>
-        <p:spPr>
-          <a:xfrm>
-            <a:off x="457200" y="1280160"/>
-            <a:ext cx="8229600" cy="256032"/>
-          </a:xfrm>
-          <a:prstGeom prst="rect">
-            <a:avLst/>
-          </a:prstGeom>
-          <a:noFill/>
-          <a:ln/>
-        </p:spPr>
-        <p:txBody>
-          <a:bodyPr wrap="square" rtlCol="0" anchor="ctr"/>
-          <a:lstStyle/>
-          <a:p>
-            <a:pPr marL="0" indent="0" algn="ctr">
-              <a:buNone/>
-            </a:pPr>
-            <a:r>
-              <a:rPr lang="en-US" sz="1100" i="1" dirty="0">
-                <a:solidFill>
-                  <a:srgbClr val="9DB8D4"/>
-                </a:solidFill>
-                <a:latin typeface="Calibri" pitchFamily="34" charset="0"/>
-                <a:ea typeface="Calibri" pitchFamily="34" charset="-122"/>
-                <a:cs typeface="Calibri" pitchFamily="34" charset="-120"/>
-              </a:rPr>
-              <a:t>Corso di Laurea Magistrale in Digital Automation Engineering</a:t>
-            </a:r>
-            <a:endParaRPr lang="en-US" sz="1100" dirty="0"/>
-          </a:p>
-        </p:txBody>
-      </p:sp>
-      <p:sp>
-        <p:nvSpPr>
-          <p:cNvPr id="6" name="Text 3"/>
-          <p:cNvSpPr/>
-          <p:nvPr/>
-        </p:nvSpPr>
-        <p:spPr>
-          <a:xfrm>
-            <a:off x="457200" y="1627632"/>
-            <a:ext cx="8229600" cy="1417320"/>
-          </a:xfrm>
-          <a:prstGeom prst="rect">
-            <a:avLst/>
-          </a:prstGeom>
-          <a:noFill/>
-          <a:ln/>
-        </p:spPr>
-        <p:txBody>
-          <a:bodyPr wrap="square" rtlCol="0" anchor="ctr"/>
-          <a:lstStyle/>
-          <a:p>
-            <a:pPr marL="0" indent="0" algn="ctr">
-              <a:buNone/>
-            </a:pPr>
-            <a:r>
-              <a:rPr lang="en-US" sz="3000" b="1" dirty="0">
-                <a:solidFill>
-                  <a:srgbClr val="FFFFFF"/>
-                </a:solidFill>
-                <a:latin typeface="Calibri" pitchFamily="34" charset="0"/>
-                <a:ea typeface="Calibri" pitchFamily="34" charset="-122"/>
-                <a:cs typeface="Calibri" pitchFamily="34" charset="-120"/>
-              </a:rPr>
-              <a:t>Deep Reinforcement Learning in</a:t>
-            </a:r>
-            <a:endParaRPr lang="en-US" sz="3000" dirty="0"/>
-          </a:p>
-          <a:p>
-            <a:pPr marL="0" indent="0" algn="ctr">
-              <a:buNone/>
-            </a:pPr>
-            <a:r>
-              <a:rPr lang="en-US" sz="3000" b="1" dirty="0">
-                <a:solidFill>
-                  <a:srgbClr val="FFFFFF"/>
-                </a:solidFill>
-                <a:latin typeface="Calibri" pitchFamily="34" charset="0"/>
-                <a:ea typeface="Calibri" pitchFamily="34" charset="-122"/>
-                <a:cs typeface="Calibri" pitchFamily="34" charset="-120"/>
-              </a:rPr>
-              <a:t>Frontier-Based Autonomous Exploration</a:t>
-            </a:r>
-            <a:endParaRPr lang="en-US" sz="3000" dirty="0"/>
-          </a:p>
-        </p:txBody>
-      </p:sp>
-      <p:sp>
-        <p:nvSpPr>
-          <p:cNvPr id="7" name="Shape 4"/>
-          <p:cNvSpPr/>
-          <p:nvPr/>
-        </p:nvSpPr>
-        <p:spPr>
-          <a:xfrm>
-            <a:off x="2286000" y="3127248"/>
-            <a:ext cx="4572000" cy="0"/>
-          </a:xfrm>
-          <a:prstGeom prst="line">
-            <a:avLst/>
-          </a:prstGeom>
-          <a:noFill/>
-          <a:ln w="19050">
-            <a:solidFill>
-              <a:srgbClr val="C8472C"/>
-            </a:solidFill>
-            <a:prstDash val="solid"/>
-          </a:ln>
-        </p:spPr>
-      </p:sp>
-      <p:sp>
-        <p:nvSpPr>
-          <p:cNvPr id="8" name="Text 5"/>
-          <p:cNvSpPr/>
-          <p:nvPr/>
-        </p:nvSpPr>
-        <p:spPr>
-          <a:xfrm>
-            <a:off x="914400" y="3246120"/>
-            <a:ext cx="7315200" cy="292608"/>
-          </a:xfrm>
-          <a:prstGeom prst="rect">
-            <a:avLst/>
-          </a:prstGeom>
-          <a:noFill/>
-          <a:ln/>
-        </p:spPr>
-        <p:txBody>
-          <a:bodyPr wrap="square" rtlCol="0" anchor="ctr"/>
-          <a:lstStyle/>
-          <a:p>
-            <a:pPr marL="0" indent="0" algn="l">
-              <a:buNone/>
-            </a:pPr>
-            <a:r>
-              <a:rPr lang="en-US" sz="1200" dirty="0">
-                <a:solidFill>
-                  <a:srgbClr val="9DB8D4"/>
-                </a:solidFill>
-                <a:latin typeface="Calibri" pitchFamily="34" charset="0"/>
-                <a:ea typeface="Calibri" pitchFamily="34" charset="-122"/>
-                <a:cs typeface="Calibri" pitchFamily="34" charset="-120"/>
-              </a:rPr>
-              <a:t>Tesi di Laurea di:  </a:t>
-            </a:r>
-            <a:r>
-              <a:rPr lang="en-US" sz="1200" b="1" dirty="0">
-                <a:solidFill>
-                  <a:srgbClr val="FFFFFF"/>
-                </a:solidFill>
-                <a:latin typeface="Calibri" pitchFamily="34" charset="0"/>
-                <a:ea typeface="Calibri" pitchFamily="34" charset="-122"/>
-                <a:cs typeface="Calibri" pitchFamily="34" charset="-120"/>
-              </a:rPr>
-              <a:t>Paolo Spallanzani</a:t>
-            </a:r>
-            <a:endParaRPr lang="en-US" sz="1200" dirty="0"/>
-          </a:p>
-        </p:txBody>
-      </p:sp>
-      <p:sp>
-        <p:nvSpPr>
-          <p:cNvPr id="9" name="Text 6"/>
-          <p:cNvSpPr/>
-          <p:nvPr/>
-        </p:nvSpPr>
-        <p:spPr>
-          <a:xfrm>
-            <a:off x="914400" y="3566160"/>
-            <a:ext cx="7315200" cy="274320"/>
-          </a:xfrm>
-          <a:prstGeom prst="rect">
-            <a:avLst/>
-          </a:prstGeom>
-          <a:noFill/>
-          <a:ln/>
-        </p:spPr>
-        <p:txBody>
-          <a:bodyPr wrap="square" rtlCol="0" anchor="ctr"/>
-          <a:lstStyle/>
-          <a:p>
-            <a:pPr marL="0" indent="0">
-              <a:buNone/>
-            </a:pPr>
-            <a:r>
-              <a:rPr lang="en-US" sz="1100" dirty="0">
-                <a:solidFill>
-                  <a:srgbClr val="9DB8D4"/>
-                </a:solidFill>
-                <a:latin typeface="Calibri" pitchFamily="34" charset="0"/>
-                <a:ea typeface="Calibri" pitchFamily="34" charset="-122"/>
-                <a:cs typeface="Calibri" pitchFamily="34" charset="-120"/>
-              </a:rPr>
-              <a:t>Relatore:  </a:t>
-            </a:r>
-            <a:r>
-              <a:rPr lang="en-US" sz="1100" b="1" dirty="0">
-                <a:solidFill>
-                  <a:srgbClr val="FFFFFF"/>
-                </a:solidFill>
-                <a:latin typeface="Calibri" pitchFamily="34" charset="0"/>
-                <a:ea typeface="Calibri" pitchFamily="34" charset="-122"/>
-                <a:cs typeface="Calibri" pitchFamily="34" charset="-120"/>
-              </a:rPr>
-              <a:t>Prof. Lorenzo Sabattini</a:t>
-            </a:r>
-            <a:endParaRPr lang="en-US" sz="1100" dirty="0"/>
-          </a:p>
-        </p:txBody>
-      </p:sp>
-      <p:sp>
-        <p:nvSpPr>
-          <p:cNvPr id="10" name="Text 7"/>
-          <p:cNvSpPr/>
-          <p:nvPr/>
-        </p:nvSpPr>
-        <p:spPr>
-          <a:xfrm>
-            <a:off x="914400" y="3858768"/>
-            <a:ext cx="7315200" cy="274320"/>
-          </a:xfrm>
-          <a:prstGeom prst="rect">
-            <a:avLst/>
-          </a:prstGeom>
-          <a:noFill/>
-          <a:ln/>
-        </p:spPr>
-        <p:txBody>
-          <a:bodyPr wrap="square" rtlCol="0" anchor="ctr"/>
-          <a:lstStyle/>
-          <a:p>
-            <a:pPr marL="0" indent="0">
-              <a:buNone/>
-            </a:pPr>
-            <a:r>
-              <a:rPr lang="en-US" sz="1100" dirty="0">
-                <a:solidFill>
-                  <a:srgbClr val="9DB8D4"/>
-                </a:solidFill>
-                <a:latin typeface="Calibri" pitchFamily="34" charset="0"/>
-                <a:ea typeface="Calibri" pitchFamily="34" charset="-122"/>
-                <a:cs typeface="Calibri" pitchFamily="34" charset="-120"/>
-              </a:rPr>
-              <a:t>Correlatori:  </a:t>
-            </a:r>
-            <a:r>
-              <a:rPr lang="en-US" sz="1100" b="1" dirty="0">
-                <a:solidFill>
-                  <a:srgbClr val="FFFFFF"/>
-                </a:solidFill>
-                <a:latin typeface="Calibri" pitchFamily="34" charset="0"/>
-                <a:ea typeface="Calibri" pitchFamily="34" charset="-122"/>
-                <a:cs typeface="Calibri" pitchFamily="34" charset="-120"/>
-              </a:rPr>
-              <a:t>Dott. Mattia Catellani  ·  Dott. Mattia Mantovani</a:t>
-            </a:r>
-            <a:endParaRPr lang="en-US" sz="1100" dirty="0"/>
-          </a:p>
-        </p:txBody>
-      </p:sp>
-      <p:sp>
-        <p:nvSpPr>
-          <p:cNvPr id="11" name="Text 8"/>
-          <p:cNvSpPr/>
-          <p:nvPr/>
-        </p:nvSpPr>
-        <p:spPr>
-          <a:xfrm>
-            <a:off x="457200" y="4526280"/>
-            <a:ext cx="8229600" cy="256032"/>
-          </a:xfrm>
-          <a:prstGeom prst="rect">
-            <a:avLst/>
-          </a:prstGeom>
-          <a:noFill/>
-          <a:ln/>
-        </p:spPr>
-        <p:txBody>
-          <a:bodyPr wrap="square" rtlCol="0" anchor="ctr"/>
-          <a:lstStyle/>
-          <a:p>
-            <a:pPr marL="0" indent="0" algn="ctr">
-              <a:buNone/>
-            </a:pPr>
-            <a:r>
-              <a:rPr lang="en-US" sz="1000" dirty="0">
-                <a:solidFill>
-                  <a:srgbClr val="9DB8D4"/>
-                </a:solidFill>
-                <a:latin typeface="Calibri" pitchFamily="34" charset="0"/>
-                <a:ea typeface="Calibri" pitchFamily="34" charset="-122"/>
-                <a:cs typeface="Calibri" pitchFamily="34" charset="-120"/>
-              </a:rPr>
-              <a:t>Anno Accademico 2024/2025</a:t>
-            </a:r>
-            <a:endParaRPr lang="en-US" sz="1000" dirty="0"/>
-          </a:p>
-        </p:txBody>
-      </p:sp>
     </p:spTree>
+    <p:extLst>
+      <p:ext uri="{BB962C8B-B14F-4D97-AF65-F5344CB8AC3E}">
+        <p14:creationId xmlns:p14="http://schemas.microsoft.com/office/powerpoint/2010/main" val="989418269"/>
+      </p:ext>
+    </p:extLst>
+  </p:cSld>
+  <p:clrMap bg1="lt1" tx1="dk1" bg2="lt2" tx2="dk2" accent1="accent1" accent2="accent2" accent3="accent3" accent4="accent4" accent5="accent5" accent6="accent6" hlink="hlink" folHlink="folHlink"/>
+  <p:sldLayoutIdLst>
+    <p:sldLayoutId id="2147483666" r:id="rId1"/>
+    <p:sldLayoutId id="2147483667" r:id="rId2"/>
+  </p:sldLayoutIdLst>
+  <p:txStyles>
+    <p:titleStyle>
+      <a:lvl1pPr algn="l" defTabSz="914400" rtl="0" eaLnBrk="1" latinLnBrk="0" hangingPunct="1">
+        <a:lnSpc>
+          <a:spcPct val="90000"/>
+        </a:lnSpc>
+        <a:spcBef>
+          <a:spcPct val="0"/>
+        </a:spcBef>
+        <a:buNone/>
+        <a:defRPr sz="4400" kern="1200">
+          <a:solidFill>
+            <a:schemeClr val="tx1"/>
+          </a:solidFill>
+          <a:latin typeface="+mj-lt"/>
+          <a:ea typeface="+mj-ea"/>
+          <a:cs typeface="+mj-cs"/>
+        </a:defRPr>
+      </a:lvl1pPr>
+    </p:titleStyle>
+    <p:bodyStyle>
+      <a:lvl1pPr marL="228600" indent="-228600" algn="l" defTabSz="914400" rtl="0" eaLnBrk="1" latinLnBrk="0" hangingPunct="1">
+        <a:lnSpc>
+          <a:spcPct val="90000"/>
+        </a:lnSpc>
+        <a:spcBef>
+          <a:spcPts val="1000"/>
+        </a:spcBef>
+        <a:buFont typeface="Arial" panose="020B0604020202020204" pitchFamily="34" charset="0"/>
+        <a:buChar char="•"/>
+        <a:defRPr sz="2800" kern="1200">
+          <a:solidFill>
+            <a:schemeClr val="tx1"/>
+          </a:solidFill>
+          <a:latin typeface="+mn-lt"/>
+          <a:ea typeface="+mn-ea"/>
+          <a:cs typeface="+mn-cs"/>
+        </a:defRPr>
+      </a:lvl1pPr>
+      <a:lvl2pPr marL="685800" indent="-228600" algn="l" defTabSz="914400" rtl="0" eaLnBrk="1" latinLnBrk="0" hangingPunct="1">
+        <a:lnSpc>
+          <a:spcPct val="90000"/>
+        </a:lnSpc>
+        <a:spcBef>
+          <a:spcPts val="500"/>
+        </a:spcBef>
+        <a:buFont typeface="Arial" panose="020B0604020202020204" pitchFamily="34" charset="0"/>
+        <a:buChar char="•"/>
+        <a:defRPr sz="2400" kern="1200">
+          <a:solidFill>
+            <a:schemeClr val="tx1"/>
+          </a:solidFill>
+          <a:latin typeface="+mn-lt"/>
+          <a:ea typeface="+mn-ea"/>
+          <a:cs typeface="+mn-cs"/>
+        </a:defRPr>
+      </a:lvl2pPr>
+      <a:lvl3pPr marL="1143000" indent="-228600" algn="l" defTabSz="914400" rtl="0" eaLnBrk="1" latinLnBrk="0" hangingPunct="1">
+        <a:lnSpc>
+          <a:spcPct val="90000"/>
+        </a:lnSpc>
+        <a:spcBef>
+          <a:spcPts val="500"/>
+        </a:spcBef>
+        <a:buFont typeface="Arial" panose="020B0604020202020204" pitchFamily="34" charset="0"/>
+        <a:buChar char="•"/>
+        <a:defRPr sz="2000" kern="1200">
+          <a:solidFill>
+            <a:schemeClr val="tx1"/>
+          </a:solidFill>
+          <a:latin typeface="+mn-lt"/>
+          <a:ea typeface="+mn-ea"/>
+          <a:cs typeface="+mn-cs"/>
+        </a:defRPr>
+      </a:lvl3pPr>
+      <a:lvl4pPr marL="1600200" indent="-228600" algn="l" defTabSz="914400" rtl="0" eaLnBrk="1" latinLnBrk="0" hangingPunct="1">
+        <a:lnSpc>
+          <a:spcPct val="90000"/>
+        </a:lnSpc>
+        <a:spcBef>
+          <a:spcPts val="500"/>
+        </a:spcBef>
+        <a:buFont typeface="Arial" panose="020B0604020202020204" pitchFamily="34" charset="0"/>
+        <a:buChar char="•"/>
+        <a:defRPr sz="1800" kern="1200">
+          <a:solidFill>
+            <a:schemeClr val="tx1"/>
+          </a:solidFill>
+          <a:latin typeface="+mn-lt"/>
+          <a:ea typeface="+mn-ea"/>
+          <a:cs typeface="+mn-cs"/>
+        </a:defRPr>
+      </a:lvl4pPr>
+      <a:lvl5pPr marL="2057400" indent="-228600" algn="l" defTabSz="914400" rtl="0" eaLnBrk="1" latinLnBrk="0" hangingPunct="1">
+        <a:lnSpc>
+          <a:spcPct val="90000"/>
+        </a:lnSpc>
+        <a:spcBef>
+          <a:spcPts val="500"/>
+        </a:spcBef>
+        <a:buFont typeface="Arial" panose="020B0604020202020204" pitchFamily="34" charset="0"/>
+        <a:buChar char="•"/>
+        <a:defRPr sz="1800" kern="1200">
+          <a:solidFill>
+            <a:schemeClr val="tx1"/>
+          </a:solidFill>
+          <a:latin typeface="+mn-lt"/>
+          <a:ea typeface="+mn-ea"/>
+          <a:cs typeface="+mn-cs"/>
+        </a:defRPr>
+      </a:lvl5pPr>
+      <a:lvl6pPr marL="2514600" indent="-228600" algn="l" defTabSz="914400" rtl="0" eaLnBrk="1" latinLnBrk="0" hangingPunct="1">
+        <a:lnSpc>
+          <a:spcPct val="90000"/>
+        </a:lnSpc>
+        <a:spcBef>
+          <a:spcPts val="500"/>
+        </a:spcBef>
+        <a:buFont typeface="Arial" panose="020B0604020202020204" pitchFamily="34" charset="0"/>
+        <a:buChar char="•"/>
+        <a:defRPr sz="1800" kern="1200">
+          <a:solidFill>
+            <a:schemeClr val="tx1"/>
+          </a:solidFill>
+          <a:latin typeface="+mn-lt"/>
+          <a:ea typeface="+mn-ea"/>
+          <a:cs typeface="+mn-cs"/>
+        </a:defRPr>
+      </a:lvl6pPr>
+      <a:lvl7pPr marL="2971800" indent="-228600" algn="l" defTabSz="914400" rtl="0" eaLnBrk="1" latinLnBrk="0" hangingPunct="1">
+        <a:lnSpc>
+          <a:spcPct val="90000"/>
+        </a:lnSpc>
+        <a:spcBef>
+          <a:spcPts val="500"/>
+        </a:spcBef>
+        <a:buFont typeface="Arial" panose="020B0604020202020204" pitchFamily="34" charset="0"/>
+        <a:buChar char="•"/>
+        <a:defRPr sz="1800" kern="1200">
+          <a:solidFill>
+            <a:schemeClr val="tx1"/>
+          </a:solidFill>
+          <a:latin typeface="+mn-lt"/>
+          <a:ea typeface="+mn-ea"/>
+          <a:cs typeface="+mn-cs"/>
+        </a:defRPr>
+      </a:lvl7pPr>
+      <a:lvl8pPr marL="3429000" indent="-228600" algn="l" defTabSz="914400" rtl="0" eaLnBrk="1" latinLnBrk="0" hangingPunct="1">
+        <a:lnSpc>
+          <a:spcPct val="90000"/>
+        </a:lnSpc>
+        <a:spcBef>
+          <a:spcPts val="500"/>
+        </a:spcBef>
+        <a:buFont typeface="Arial" panose="020B0604020202020204" pitchFamily="34" charset="0"/>
+        <a:buChar char="•"/>
+        <a:defRPr sz="1800" kern="1200">
+          <a:solidFill>
+            <a:schemeClr val="tx1"/>
+          </a:solidFill>
+          <a:latin typeface="+mn-lt"/>
+          <a:ea typeface="+mn-ea"/>
+          <a:cs typeface="+mn-cs"/>
+        </a:defRPr>
+      </a:lvl8pPr>
+      <a:lvl9pPr marL="3886200" indent="-228600" algn="l" defTabSz="914400" rtl="0" eaLnBrk="1" latinLnBrk="0" hangingPunct="1">
+        <a:lnSpc>
+          <a:spcPct val="90000"/>
+        </a:lnSpc>
+        <a:spcBef>
+          <a:spcPts val="500"/>
+        </a:spcBef>
+        <a:buFont typeface="Arial" panose="020B0604020202020204" pitchFamily="34" charset="0"/>
+        <a:buChar char="•"/>
+        <a:defRPr sz="1800" kern="1200">
+          <a:solidFill>
+            <a:schemeClr val="tx1"/>
+          </a:solidFill>
+          <a:latin typeface="+mn-lt"/>
+          <a:ea typeface="+mn-ea"/>
+          <a:cs typeface="+mn-cs"/>
+        </a:defRPr>
+      </a:lvl9pPr>
+    </p:bodyStyle>
+    <p:otherStyle>
+      <a:defPPr>
+        <a:defRPr lang="it-IT"/>
+      </a:defPPr>
+      <a:lvl1pPr marL="0" algn="l" defTabSz="914400" rtl="0" eaLnBrk="1" latinLnBrk="0" hangingPunct="1">
+        <a:defRPr sz="1800" kern="1200">
+          <a:solidFill>
+            <a:schemeClr val="tx1"/>
+          </a:solidFill>
+          <a:latin typeface="+mn-lt"/>
+          <a:ea typeface="+mn-ea"/>
+          <a:cs typeface="+mn-cs"/>
+        </a:defRPr>
+      </a:lvl1pPr>
+      <a:lvl2pPr marL="457200" algn="l" defTabSz="914400" rtl="0" eaLnBrk="1" latinLnBrk="0" hangingPunct="1">
+        <a:defRPr sz="1800" kern="1200">
+          <a:solidFill>
+            <a:schemeClr val="tx1"/>
+          </a:solidFill>
+          <a:latin typeface="+mn-lt"/>
+          <a:ea typeface="+mn-ea"/>
+          <a:cs typeface="+mn-cs"/>
+        </a:defRPr>
+      </a:lvl2pPr>
+      <a:lvl3pPr marL="914400" algn="l" defTabSz="914400" rtl="0" eaLnBrk="1" latinLnBrk="0" hangingPunct="1">
+        <a:defRPr sz="1800" kern="1200">
+          <a:solidFill>
+            <a:schemeClr val="tx1"/>
+          </a:solidFill>
+          <a:latin typeface="+mn-lt"/>
+          <a:ea typeface="+mn-ea"/>
+          <a:cs typeface="+mn-cs"/>
+        </a:defRPr>
+      </a:lvl3pPr>
+      <a:lvl4pPr marL="1371600" algn="l" defTabSz="914400" rtl="0" eaLnBrk="1" latinLnBrk="0" hangingPunct="1">
+        <a:defRPr sz="1800" kern="1200">
+          <a:solidFill>
+            <a:schemeClr val="tx1"/>
+          </a:solidFill>
+          <a:latin typeface="+mn-lt"/>
+          <a:ea typeface="+mn-ea"/>
+          <a:cs typeface="+mn-cs"/>
+        </a:defRPr>
+      </a:lvl4pPr>
+      <a:lvl5pPr marL="1828800" algn="l" defTabSz="914400" rtl="0" eaLnBrk="1" latinLnBrk="0" hangingPunct="1">
+        <a:defRPr sz="1800" kern="1200">
+          <a:solidFill>
+            <a:schemeClr val="tx1"/>
+          </a:solidFill>
+          <a:latin typeface="+mn-lt"/>
+          <a:ea typeface="+mn-ea"/>
+          <a:cs typeface="+mn-cs"/>
+        </a:defRPr>
+      </a:lvl5pPr>
+      <a:lvl6pPr marL="2286000" algn="l" defTabSz="914400" rtl="0" eaLnBrk="1" latinLnBrk="0" hangingPunct="1">
+        <a:defRPr sz="1800" kern="1200">
+          <a:solidFill>
+            <a:schemeClr val="tx1"/>
+          </a:solidFill>
+          <a:latin typeface="+mn-lt"/>
+          <a:ea typeface="+mn-ea"/>
+          <a:cs typeface="+mn-cs"/>
+        </a:defRPr>
+      </a:lvl6pPr>
+      <a:lvl7pPr marL="2743200" algn="l" defTabSz="914400" rtl="0" eaLnBrk="1" latinLnBrk="0" hangingPunct="1">
+        <a:defRPr sz="1800" kern="1200">
+          <a:solidFill>
+            <a:schemeClr val="tx1"/>
+          </a:solidFill>
+          <a:latin typeface="+mn-lt"/>
+          <a:ea typeface="+mn-ea"/>
+          <a:cs typeface="+mn-cs"/>
+        </a:defRPr>
+      </a:lvl7pPr>
+      <a:lvl8pPr marL="3200400" algn="l" defTabSz="914400" rtl="0" eaLnBrk="1" latinLnBrk="0" hangingPunct="1">
+        <a:defRPr sz="1800" kern="1200">
+          <a:solidFill>
+            <a:schemeClr val="tx1"/>
+          </a:solidFill>
+          <a:latin typeface="+mn-lt"/>
+          <a:ea typeface="+mn-ea"/>
+          <a:cs typeface="+mn-cs"/>
+        </a:defRPr>
+      </a:lvl8pPr>
+      <a:lvl9pPr marL="3657600" algn="l" defTabSz="914400" rtl="0" eaLnBrk="1" latinLnBrk="0" hangingPunct="1">
+        <a:defRPr sz="1800" kern="1200">
+          <a:solidFill>
+            <a:schemeClr val="tx1"/>
+          </a:solidFill>
+          <a:latin typeface="+mn-lt"/>
+          <a:ea typeface="+mn-ea"/>
+          <a:cs typeface="+mn-cs"/>
+        </a:defRPr>
+      </a:lvl9pPr>
+    </p:otherStyle>
+  </p:txStyles>
+</p:sldMaster>
+</file>
+
+<file path=ppt/slides/slide1.xml><?xml version="1.0" encoding="utf-8"?>
+<p:sld xmlns:a="http://schemas.openxmlformats.org/drawingml/2006/main" xmlns:r="http://schemas.openxmlformats.org/officeDocument/2006/relationships" xmlns:p="http://schemas.openxmlformats.org/presentationml/2006/main">
+  <p:cSld>
+    <p:spTree>
+      <p:nvGrpSpPr>
+        <p:cNvPr id="1" name=""/>
+        <p:cNvGrpSpPr/>
+        <p:nvPr/>
+      </p:nvGrpSpPr>
+      <p:grpSpPr>
+        <a:xfrm>
+          <a:off x="0" y="0"/>
+          <a:ext cx="0" cy="0"/>
+          <a:chOff x="0" y="0"/>
+          <a:chExt cx="0" cy="0"/>
+        </a:xfrm>
+      </p:grpSpPr>
+    </p:spTree>
+    <p:extLst>
+      <p:ext uri="{BB962C8B-B14F-4D97-AF65-F5344CB8AC3E}">
+        <p14:creationId xmlns:p14="http://schemas.microsoft.com/office/powerpoint/2010/main" val="3954679846"/>
+      </p:ext>
+    </p:extLst>
   </p:cSld>
   <p:clrMapOvr>
     <a:masterClrMapping/>
@@ -1082,62 +2965,6 @@
       </p:grpSpPr>
       <p:sp>
         <p:nvSpPr>
-          <p:cNvPr id="2" name="Rettangolo 1">
-            <a:extLst>
-              <a:ext uri="{FF2B5EF4-FFF2-40B4-BE49-F238E27FC236}">
-                <a16:creationId xmlns:a16="http://schemas.microsoft.com/office/drawing/2014/main" id="{B1ECE3C6-7542-4596-B5C4-20D7578DAC49}"/>
-              </a:ext>
-            </a:extLst>
-          </p:cNvPr>
-          <p:cNvSpPr/>
-          <p:nvPr/>
-        </p:nvSpPr>
-        <p:spPr>
-          <a:xfrm>
-            <a:off x="317500" y="241300"/>
-            <a:ext cx="63500" cy="457200"/>
-          </a:xfrm>
-          <a:prstGeom prst="rect">
-            <a:avLst/>
-          </a:prstGeom>
-          <a:solidFill>
-            <a:srgbClr val="C8472C"/>
-          </a:solidFill>
-          <a:ln w="6350" cap="flat" cmpd="sng" algn="ctr">
-            <a:solidFill>
-              <a:srgbClr val="C8472C"/>
-            </a:solidFill>
-            <a:prstDash val="solid"/>
-            <a:miter lim="800000"/>
-          </a:ln>
-        </p:spPr>
-        <p:style>
-          <a:lnRef idx="2">
-            <a:schemeClr val="accent1">
-              <a:shade val="15000"/>
-            </a:schemeClr>
-          </a:lnRef>
-          <a:fillRef idx="1">
-            <a:schemeClr val="accent1"/>
-          </a:fillRef>
-          <a:effectRef idx="0">
-            <a:schemeClr val="accent1"/>
-          </a:effectRef>
-          <a:fontRef idx="minor">
-            <a:schemeClr val="lt1"/>
-          </a:fontRef>
-        </p:style>
-        <p:txBody>
-          <a:bodyPr vertOverflow="clip" horzOverflow="clip" rtlCol="0" anchor="t"/>
-          <a:lstStyle/>
-          <a:p>
-            <a:pPr algn="l"/>
-            <a:endParaRPr lang="it-IT"/>
-          </a:p>
-        </p:txBody>
-      </p:sp>
-      <p:sp>
-        <p:nvSpPr>
           <p:cNvPr id="3" name="CasellaDiTesto 2">
             <a:extLst>
               <a:ext uri="{FF2B5EF4-FFF2-40B4-BE49-F238E27FC236}">
@@ -1166,7 +2993,7 @@
           <a:p>
             <a:pPr algn="l"/>
             <a:r>
-              <a:rPr lang="it-IT" sz="2600" b="1">
+              <a:rPr lang="it-IT" sz="2600" b="1" dirty="0">
                 <a:solidFill>
                   <a:srgbClr val="1A1A1A"/>
                 </a:solidFill>
@@ -1209,7 +3036,7 @@
           <a:p>
             <a:pPr algn="l"/>
             <a:r>
-              <a:rPr lang="it-IT" sz="1600">
+              <a:rPr lang="it-IT" sz="1600" dirty="0">
                 <a:solidFill>
                   <a:srgbClr val="333333"/>
                 </a:solidFill>
@@ -1217,148 +3044,52 @@
                 <a:ea typeface="Calibri"/>
                 <a:cs typeface="Calibri"/>
               </a:rPr>
-              <a:t>Content goes here</a:t>
-            </a:r>
-          </a:p>
-        </p:txBody>
-      </p:sp>
-      <p:sp>
-        <p:nvSpPr>
-          <p:cNvPr id="6" name="CasellaDiTesto 5">
-            <a:extLst>
-              <a:ext uri="{FF2B5EF4-FFF2-40B4-BE49-F238E27FC236}">
-                <a16:creationId xmlns:a16="http://schemas.microsoft.com/office/drawing/2014/main" id="{0EE963F6-1215-4176-A6F9-425C8487A537}"/>
-              </a:ext>
-            </a:extLst>
-          </p:cNvPr>
-          <p:cNvSpPr txBox="1"/>
-          <p:nvPr/>
-        </p:nvSpPr>
-        <p:spPr>
-          <a:xfrm>
-            <a:off x="317500" y="4851400"/>
-            <a:ext cx="7772400" cy="203200"/>
-          </a:xfrm>
-          <a:prstGeom prst="rect">
-            <a:avLst/>
-          </a:prstGeom>
-          <a:noFill/>
-        </p:spPr>
-        <p:txBody>
-          <a:bodyPr vertOverflow="overflow" vert="horz" wrap="square" rtlCol="0" anchor="t">
-            <a:noAutofit/>
-          </a:bodyPr>
-          <a:lstStyle/>
-          <a:p>
-            <a:pPr algn="l"/>
-            <a:r>
-              <a:rPr lang="it-IT" sz="900">
-                <a:solidFill>
-                  <a:srgbClr val="BBBBBB"/>
+              <a:t>Content </a:t>
+            </a:r>
+            <a:r>
+              <a:rPr lang="it-IT" sz="1600" dirty="0" err="1">
+                <a:solidFill>
+                  <a:srgbClr val="333333"/>
                 </a:solidFill>
                 <a:latin typeface="Calibri"/>
                 <a:ea typeface="Calibri"/>
                 <a:cs typeface="Calibri"/>
               </a:rPr>
-              <a:t>Author  ·  Presentation Title</a:t>
-            </a:r>
-          </a:p>
-        </p:txBody>
-      </p:sp>
-      <p:sp>
-        <p:nvSpPr>
-          <p:cNvPr id="7" name="CasellaDiTesto 6">
-            <a:extLst>
-              <a:ext uri="{FF2B5EF4-FFF2-40B4-BE49-F238E27FC236}">
-                <a16:creationId xmlns:a16="http://schemas.microsoft.com/office/drawing/2014/main" id="{4036B547-931C-4282-9366-2C62C0C407CC}"/>
-              </a:ext>
-            </a:extLst>
-          </p:cNvPr>
-          <p:cNvSpPr txBox="1"/>
-          <p:nvPr/>
-        </p:nvSpPr>
-        <p:spPr>
-          <a:xfrm>
-            <a:off x="8407400" y="4851400"/>
-            <a:ext cx="457200" cy="203200"/>
-          </a:xfrm>
-          <a:prstGeom prst="rect">
-            <a:avLst/>
-          </a:prstGeom>
-          <a:noFill/>
-        </p:spPr>
-        <p:txBody>
-          <a:bodyPr vertOverflow="overflow" vert="horz" wrap="square" rtlCol="0" anchor="t">
-            <a:noAutofit/>
-          </a:bodyPr>
-          <a:lstStyle/>
-          <a:p>
-            <a:pPr algn="l"/>
-            <a:r>
-              <a:rPr lang="it-IT" sz="900">
-                <a:solidFill>
-                  <a:srgbClr val="BBBBBB"/>
+              <a:t>goes</a:t>
+            </a:r>
+            <a:r>
+              <a:rPr lang="it-IT" sz="1600" dirty="0">
+                <a:solidFill>
+                  <a:srgbClr val="333333"/>
                 </a:solidFill>
                 <a:latin typeface="Calibri"/>
                 <a:ea typeface="Calibri"/>
                 <a:cs typeface="Calibri"/>
               </a:rPr>
-              <a:t>2 / N</a:t>
-            </a:r>
+              <a:t> </a:t>
+            </a:r>
+            <a:r>
+              <a:rPr lang="it-IT" sz="1600" dirty="0" err="1">
+                <a:solidFill>
+                  <a:srgbClr val="333333"/>
+                </a:solidFill>
+                <a:latin typeface="Calibri"/>
+                <a:ea typeface="Calibri"/>
+                <a:cs typeface="Calibri"/>
+              </a:rPr>
+              <a:t>here</a:t>
+            </a:r>
+            <a:endParaRPr lang="it-IT" sz="1600" dirty="0">
+              <a:solidFill>
+                <a:srgbClr val="333333"/>
+              </a:solidFill>
+              <a:latin typeface="Calibri"/>
+              <a:ea typeface="Calibri"/>
+              <a:cs typeface="Calibri"/>
+            </a:endParaRPr>
           </a:p>
         </p:txBody>
       </p:sp>
-      <p:pic>
-        <p:nvPicPr>
-          <p:cNvPr id="8" name="Immagine 7">
-            <a:extLst>
-              <a:ext uri="{FF2B5EF4-FFF2-40B4-BE49-F238E27FC236}">
-                <a16:creationId xmlns:a16="http://schemas.microsoft.com/office/drawing/2014/main" id="{A0D07AD2-AA27-6726-A12A-534AE9AD36E8}"/>
-              </a:ext>
-            </a:extLst>
-          </p:cNvPr>
-          <p:cNvPicPr>
-            <a:picLocks noChangeAspect="1"/>
-          </p:cNvPicPr>
-          <p:nvPr/>
-        </p:nvPicPr>
-        <p:blipFill>
-          <a:blip r:embed="rId2"/>
-          <a:stretch>
-            <a:fillRect/>
-          </a:stretch>
-        </p:blipFill>
-        <p:spPr>
-          <a:xfrm>
-            <a:off x="7442200" y="4572000"/>
-            <a:ext cx="1524000" cy="548640"/>
-          </a:xfrm>
-          <a:prstGeom prst="rect">
-            <a:avLst/>
-          </a:prstGeom>
-        </p:spPr>
-      </p:pic>
-      <p:cxnSp>
-        <p:nvCxnSpPr>
-          <p:cNvPr id="20" name="Divider Line"/>
-          <p:cNvCxnSpPr/>
-          <p:nvPr/>
-        </p:nvCxnSpPr>
-        <p:spPr>
-          <a:xfrm>
-            <a:off x="320040" y="777240"/>
-            <a:ext cx="8503920" cy="0"/>
-          </a:xfrm>
-          <a:prstGeom prst="line">
-            <a:avLst/>
-          </a:prstGeom>
-          <a:ln w="12700">
-            <a:solidFill>
-              <a:srgbClr val="D6E4F0"/>
-            </a:solidFill>
-          </a:ln>
-        </p:spPr>
-      </p:cxnSp>
     </p:spTree>
     <p:extLst>
       <p:ext uri="{BB962C8B-B14F-4D97-AF65-F5344CB8AC3E}">
@@ -1391,62 +3122,6 @@
       </p:grpSpPr>
       <p:sp>
         <p:nvSpPr>
-          <p:cNvPr id="2" name="Rettangolo 1">
-            <a:extLst>
-              <a:ext uri="{FF2B5EF4-FFF2-40B4-BE49-F238E27FC236}">
-                <a16:creationId xmlns:a16="http://schemas.microsoft.com/office/drawing/2014/main" id="{874E9259-1AF1-4428-AE16-D525D7D6CF9E}"/>
-              </a:ext>
-            </a:extLst>
-          </p:cNvPr>
-          <p:cNvSpPr/>
-          <p:nvPr/>
-        </p:nvSpPr>
-        <p:spPr>
-          <a:xfrm>
-            <a:off x="317500" y="241300"/>
-            <a:ext cx="63500" cy="457200"/>
-          </a:xfrm>
-          <a:prstGeom prst="rect">
-            <a:avLst/>
-          </a:prstGeom>
-          <a:solidFill>
-            <a:srgbClr val="C8472C"/>
-          </a:solidFill>
-          <a:ln w="6350" cap="flat" cmpd="sng" algn="ctr">
-            <a:solidFill>
-              <a:srgbClr val="C8472C"/>
-            </a:solidFill>
-            <a:prstDash val="solid"/>
-            <a:miter lim="800000"/>
-          </a:ln>
-        </p:spPr>
-        <p:style>
-          <a:lnRef idx="2">
-            <a:schemeClr val="accent1">
-              <a:shade val="15000"/>
-            </a:schemeClr>
-          </a:lnRef>
-          <a:fillRef idx="1">
-            <a:schemeClr val="accent1"/>
-          </a:fillRef>
-          <a:effectRef idx="0">
-            <a:schemeClr val="accent1"/>
-          </a:effectRef>
-          <a:fontRef idx="minor">
-            <a:schemeClr val="lt1"/>
-          </a:fontRef>
-        </p:style>
-        <p:txBody>
-          <a:bodyPr vertOverflow="clip" horzOverflow="clip" rtlCol="0" anchor="t"/>
-          <a:lstStyle/>
-          <a:p>
-            <a:pPr algn="l"/>
-            <a:endParaRPr lang="it-IT"/>
-          </a:p>
-        </p:txBody>
-      </p:sp>
-      <p:sp>
-        <p:nvSpPr>
           <p:cNvPr id="3" name="CasellaDiTesto 2">
             <a:extLst>
               <a:ext uri="{FF2B5EF4-FFF2-40B4-BE49-F238E27FC236}">
@@ -1475,7 +3150,7 @@
           <a:p>
             <a:pPr algn="l"/>
             <a:r>
-              <a:rPr lang="it-IT" sz="2600" b="1">
+              <a:rPr lang="it-IT" sz="2600" b="1" dirty="0">
                 <a:solidFill>
                   <a:srgbClr val="1A1A1A"/>
                 </a:solidFill>
@@ -1518,7 +3193,7 @@
           <a:p>
             <a:pPr algn="l"/>
             <a:r>
-              <a:rPr lang="it-IT" sz="1600">
+              <a:rPr lang="it-IT" sz="1600" dirty="0">
                 <a:solidFill>
                   <a:srgbClr val="333333"/>
                 </a:solidFill>
@@ -1526,8 +3201,27 @@
                 <a:ea typeface="Calibri"/>
                 <a:cs typeface="Calibri"/>
               </a:rPr>
-              <a:t>Left content</a:t>
-            </a:r>
+              <a:t>Left </a:t>
+            </a:r>
+            <a:r>
+              <a:rPr lang="it-IT" sz="1600" dirty="0" err="1">
+                <a:solidFill>
+                  <a:srgbClr val="333333"/>
+                </a:solidFill>
+                <a:latin typeface="Calibri"/>
+                <a:ea typeface="Calibri"/>
+                <a:cs typeface="Calibri"/>
+              </a:rPr>
+              <a:t>content</a:t>
+            </a:r>
+            <a:endParaRPr lang="it-IT" sz="1600" dirty="0">
+              <a:solidFill>
+                <a:srgbClr val="333333"/>
+              </a:solidFill>
+              <a:latin typeface="Calibri"/>
+              <a:ea typeface="Calibri"/>
+              <a:cs typeface="Calibri"/>
+            </a:endParaRPr>
           </a:p>
         </p:txBody>
       </p:sp>
@@ -1574,143 +3268,6 @@
           </a:p>
         </p:txBody>
       </p:sp>
-      <p:sp>
-        <p:nvSpPr>
-          <p:cNvPr id="7" name="CasellaDiTesto 6">
-            <a:extLst>
-              <a:ext uri="{FF2B5EF4-FFF2-40B4-BE49-F238E27FC236}">
-                <a16:creationId xmlns:a16="http://schemas.microsoft.com/office/drawing/2014/main" id="{D6B61206-552D-4FD9-AD75-776CC2AA3CAA}"/>
-              </a:ext>
-            </a:extLst>
-          </p:cNvPr>
-          <p:cNvSpPr txBox="1"/>
-          <p:nvPr/>
-        </p:nvSpPr>
-        <p:spPr>
-          <a:xfrm>
-            <a:off x="317500" y="4851400"/>
-            <a:ext cx="7772400" cy="203200"/>
-          </a:xfrm>
-          <a:prstGeom prst="rect">
-            <a:avLst/>
-          </a:prstGeom>
-          <a:noFill/>
-        </p:spPr>
-        <p:txBody>
-          <a:bodyPr vertOverflow="overflow" vert="horz" wrap="square" rtlCol="0" anchor="t">
-            <a:noAutofit/>
-          </a:bodyPr>
-          <a:lstStyle/>
-          <a:p>
-            <a:pPr algn="l"/>
-            <a:r>
-              <a:rPr lang="it-IT" sz="900">
-                <a:solidFill>
-                  <a:srgbClr val="BBBBBB"/>
-                </a:solidFill>
-                <a:latin typeface="Calibri"/>
-                <a:ea typeface="Calibri"/>
-                <a:cs typeface="Calibri"/>
-              </a:rPr>
-              <a:t>Author  ·  Presentation Title</a:t>
-            </a:r>
-          </a:p>
-        </p:txBody>
-      </p:sp>
-      <p:sp>
-        <p:nvSpPr>
-          <p:cNvPr id="8" name="CasellaDiTesto 7">
-            <a:extLst>
-              <a:ext uri="{FF2B5EF4-FFF2-40B4-BE49-F238E27FC236}">
-                <a16:creationId xmlns:a16="http://schemas.microsoft.com/office/drawing/2014/main" id="{CE24E25D-E795-4F36-8C77-3D9BDC22CF01}"/>
-              </a:ext>
-            </a:extLst>
-          </p:cNvPr>
-          <p:cNvSpPr txBox="1"/>
-          <p:nvPr/>
-        </p:nvSpPr>
-        <p:spPr>
-          <a:xfrm>
-            <a:off x="8407400" y="4851400"/>
-            <a:ext cx="457200" cy="203200"/>
-          </a:xfrm>
-          <a:prstGeom prst="rect">
-            <a:avLst/>
-          </a:prstGeom>
-          <a:noFill/>
-        </p:spPr>
-        <p:txBody>
-          <a:bodyPr vertOverflow="overflow" vert="horz" wrap="square" rtlCol="0" anchor="t">
-            <a:noAutofit/>
-          </a:bodyPr>
-          <a:lstStyle/>
-          <a:p>
-            <a:pPr algn="l"/>
-            <a:r>
-              <a:rPr lang="it-IT" sz="900">
-                <a:solidFill>
-                  <a:srgbClr val="BBBBBB"/>
-                </a:solidFill>
-                <a:latin typeface="Calibri"/>
-                <a:ea typeface="Calibri"/>
-                <a:cs typeface="Calibri"/>
-              </a:rPr>
-              <a:t>3 / N</a:t>
-            </a:r>
-          </a:p>
-        </p:txBody>
-      </p:sp>
-      <p:pic>
-        <p:nvPicPr>
-          <p:cNvPr id="9" name="Immagine 8">
-            <a:extLst>
-              <a:ext uri="{FF2B5EF4-FFF2-40B4-BE49-F238E27FC236}">
-                <a16:creationId xmlns:a16="http://schemas.microsoft.com/office/drawing/2014/main" id="{2BC30061-9FCD-8D6B-EC70-945EB684CBC1}"/>
-              </a:ext>
-            </a:extLst>
-          </p:cNvPr>
-          <p:cNvPicPr>
-            <a:picLocks noChangeAspect="1"/>
-          </p:cNvPicPr>
-          <p:nvPr/>
-        </p:nvPicPr>
-        <p:blipFill>
-          <a:blip r:embed="rId2"/>
-          <a:stretch>
-            <a:fillRect/>
-          </a:stretch>
-        </p:blipFill>
-        <p:spPr>
-          <a:xfrm>
-            <a:off x="7442200" y="4572000"/>
-            <a:ext cx="1524000" cy="548640"/>
-          </a:xfrm>
-          <a:prstGeom prst="rect">
-            <a:avLst/>
-          </a:prstGeom>
-        </p:spPr>
-      </p:pic>
-      <p:cxnSp>
-        <p:nvCxnSpPr>
-          <p:cNvPr id="20" name="Divider Line"/>
-          <p:cNvCxnSpPr/>
-          <p:nvPr/>
-        </p:nvCxnSpPr>
-        <p:spPr>
-          <a:xfrm>
-            <a:off x="320040" y="777240"/>
-            <a:ext cx="8503920" cy="0"/>
-          </a:xfrm>
-          <a:prstGeom prst="line">
-            <a:avLst/>
-          </a:prstGeom>
-          <a:ln w="12700">
-            <a:solidFill>
-              <a:srgbClr val="D6E4F0"/>
-            </a:solidFill>
-          </a:ln>
-        </p:spPr>
-      </p:cxnSp>
     </p:spTree>
     <p:extLst>
       <p:ext uri="{BB962C8B-B14F-4D97-AF65-F5344CB8AC3E}">
@@ -1827,143 +3384,6 @@
           </a:p>
         </p:txBody>
       </p:sp>
-      <p:sp>
-        <p:nvSpPr>
-          <p:cNvPr id="5" name="CasellaDiTesto 4">
-            <a:extLst>
-              <a:ext uri="{FF2B5EF4-FFF2-40B4-BE49-F238E27FC236}">
-                <a16:creationId xmlns:a16="http://schemas.microsoft.com/office/drawing/2014/main" id="{742C44A4-D4FD-4AF6-B54D-6FE5728ECC31}"/>
-              </a:ext>
-            </a:extLst>
-          </p:cNvPr>
-          <p:cNvSpPr txBox="1"/>
-          <p:nvPr/>
-        </p:nvSpPr>
-        <p:spPr>
-          <a:xfrm>
-            <a:off x="317500" y="4851400"/>
-            <a:ext cx="7772400" cy="203200"/>
-          </a:xfrm>
-          <a:prstGeom prst="rect">
-            <a:avLst/>
-          </a:prstGeom>
-          <a:noFill/>
-        </p:spPr>
-        <p:txBody>
-          <a:bodyPr vertOverflow="overflow" vert="horz" wrap="square" rtlCol="0" anchor="t">
-            <a:noAutofit/>
-          </a:bodyPr>
-          <a:lstStyle/>
-          <a:p>
-            <a:pPr algn="l"/>
-            <a:r>
-              <a:rPr lang="it-IT" sz="900">
-                <a:solidFill>
-                  <a:srgbClr val="BBBBBB"/>
-                </a:solidFill>
-                <a:latin typeface="Calibri"/>
-                <a:ea typeface="Calibri"/>
-                <a:cs typeface="Calibri"/>
-              </a:rPr>
-              <a:t>Author  ·  Presentation Title</a:t>
-            </a:r>
-          </a:p>
-        </p:txBody>
-      </p:sp>
-      <p:sp>
-        <p:nvSpPr>
-          <p:cNvPr id="6" name="CasellaDiTesto 5">
-            <a:extLst>
-              <a:ext uri="{FF2B5EF4-FFF2-40B4-BE49-F238E27FC236}">
-                <a16:creationId xmlns:a16="http://schemas.microsoft.com/office/drawing/2014/main" id="{0E61C691-9D86-433B-A296-56BAECC45947}"/>
-              </a:ext>
-            </a:extLst>
-          </p:cNvPr>
-          <p:cNvSpPr txBox="1"/>
-          <p:nvPr/>
-        </p:nvSpPr>
-        <p:spPr>
-          <a:xfrm>
-            <a:off x="8407400" y="4851400"/>
-            <a:ext cx="457200" cy="203200"/>
-          </a:xfrm>
-          <a:prstGeom prst="rect">
-            <a:avLst/>
-          </a:prstGeom>
-          <a:noFill/>
-        </p:spPr>
-        <p:txBody>
-          <a:bodyPr vertOverflow="overflow" vert="horz" wrap="square" rtlCol="0" anchor="t">
-            <a:noAutofit/>
-          </a:bodyPr>
-          <a:lstStyle/>
-          <a:p>
-            <a:pPr algn="l"/>
-            <a:r>
-              <a:rPr lang="it-IT" sz="900">
-                <a:solidFill>
-                  <a:srgbClr val="BBBBBB"/>
-                </a:solidFill>
-                <a:latin typeface="Calibri"/>
-                <a:ea typeface="Calibri"/>
-                <a:cs typeface="Calibri"/>
-              </a:rPr>
-              <a:t>4 / N</a:t>
-            </a:r>
-          </a:p>
-        </p:txBody>
-      </p:sp>
-      <p:pic>
-        <p:nvPicPr>
-          <p:cNvPr id="7" name="Immagine 6">
-            <a:extLst>
-              <a:ext uri="{FF2B5EF4-FFF2-40B4-BE49-F238E27FC236}">
-                <a16:creationId xmlns:a16="http://schemas.microsoft.com/office/drawing/2014/main" id="{2ABBF85F-8B02-E386-14AD-1D129CFF7CEE}"/>
-              </a:ext>
-            </a:extLst>
-          </p:cNvPr>
-          <p:cNvPicPr>
-            <a:picLocks noChangeAspect="1"/>
-          </p:cNvPicPr>
-          <p:nvPr/>
-        </p:nvPicPr>
-        <p:blipFill>
-          <a:blip r:embed="rId2"/>
-          <a:stretch>
-            <a:fillRect/>
-          </a:stretch>
-        </p:blipFill>
-        <p:spPr>
-          <a:xfrm>
-            <a:off x="7442200" y="4572000"/>
-            <a:ext cx="1524000" cy="548640"/>
-          </a:xfrm>
-          <a:prstGeom prst="rect">
-            <a:avLst/>
-          </a:prstGeom>
-        </p:spPr>
-      </p:pic>
-      <p:cxnSp>
-        <p:nvCxnSpPr>
-          <p:cNvPr id="20" name="Accent Line"/>
-          <p:cNvCxnSpPr/>
-          <p:nvPr/>
-        </p:nvCxnSpPr>
-        <p:spPr>
-          <a:xfrm>
-            <a:off x="3556000" y="3238500"/>
-            <a:ext cx="2032000" cy="0"/>
-          </a:xfrm>
-          <a:prstGeom prst="line">
-            <a:avLst/>
-          </a:prstGeom>
-          <a:ln w="31750">
-            <a:solidFill>
-              <a:srgbClr val="C8472C"/>
-            </a:solidFill>
-          </a:ln>
-        </p:spPr>
-      </p:cxnSp>
     </p:spTree>
     <p:extLst>
       <p:ext uri="{BB962C8B-B14F-4D97-AF65-F5344CB8AC3E}">
@@ -1996,62 +3416,6 @@
       </p:grpSpPr>
       <p:sp>
         <p:nvSpPr>
-          <p:cNvPr id="2" name="Rettangolo 1">
-            <a:extLst>
-              <a:ext uri="{FF2B5EF4-FFF2-40B4-BE49-F238E27FC236}">
-                <a16:creationId xmlns:a16="http://schemas.microsoft.com/office/drawing/2014/main" id="{30C71BD7-064E-465C-972E-F96FF4ED74AB}"/>
-              </a:ext>
-            </a:extLst>
-          </p:cNvPr>
-          <p:cNvSpPr/>
-          <p:nvPr/>
-        </p:nvSpPr>
-        <p:spPr>
-          <a:xfrm>
-            <a:off x="317500" y="241300"/>
-            <a:ext cx="63500" cy="457200"/>
-          </a:xfrm>
-          <a:prstGeom prst="rect">
-            <a:avLst/>
-          </a:prstGeom>
-          <a:solidFill>
-            <a:srgbClr val="C8472C"/>
-          </a:solidFill>
-          <a:ln w="6350" cap="flat" cmpd="sng" algn="ctr">
-            <a:solidFill>
-              <a:srgbClr val="C8472C"/>
-            </a:solidFill>
-            <a:prstDash val="solid"/>
-            <a:miter lim="800000"/>
-          </a:ln>
-        </p:spPr>
-        <p:style>
-          <a:lnRef idx="2">
-            <a:schemeClr val="accent1">
-              <a:shade val="15000"/>
-            </a:schemeClr>
-          </a:lnRef>
-          <a:fillRef idx="1">
-            <a:schemeClr val="accent1"/>
-          </a:fillRef>
-          <a:effectRef idx="0">
-            <a:schemeClr val="accent1"/>
-          </a:effectRef>
-          <a:fontRef idx="minor">
-            <a:schemeClr val="lt1"/>
-          </a:fontRef>
-        </p:style>
-        <p:txBody>
-          <a:bodyPr vertOverflow="clip" horzOverflow="clip" rtlCol="0" anchor="t"/>
-          <a:lstStyle/>
-          <a:p>
-            <a:pPr algn="l"/>
-            <a:endParaRPr lang="it-IT"/>
-          </a:p>
-        </p:txBody>
-      </p:sp>
-      <p:sp>
-        <p:nvSpPr>
           <p:cNvPr id="3" name="CasellaDiTesto 2">
             <a:extLst>
               <a:ext uri="{FF2B5EF4-FFF2-40B4-BE49-F238E27FC236}">
@@ -2080,7 +3444,7 @@
           <a:p>
             <a:pPr algn="l"/>
             <a:r>
-              <a:rPr lang="it-IT" sz="2600" b="1">
+              <a:rPr lang="it-IT" sz="2600" b="1" dirty="0">
                 <a:solidFill>
                   <a:srgbClr val="1A1A1A"/>
                 </a:solidFill>
@@ -2123,7 +3487,7 @@
           <a:p>
             <a:pPr algn="l"/>
             <a:r>
-              <a:rPr lang="it-IT" sz="1600">
+              <a:rPr lang="it-IT" sz="1600" dirty="0">
                 <a:solidFill>
                   <a:srgbClr val="333333"/>
                 </a:solidFill>
@@ -2131,8 +3495,71 @@
                 <a:ea typeface="Calibri"/>
                 <a:cs typeface="Calibri"/>
               </a:rPr>
-              <a:t>Text content goes here</a:t>
-            </a:r>
+              <a:t>Text </a:t>
+            </a:r>
+            <a:r>
+              <a:rPr lang="it-IT" sz="1600" dirty="0" err="1">
+                <a:solidFill>
+                  <a:srgbClr val="333333"/>
+                </a:solidFill>
+                <a:latin typeface="Calibri"/>
+                <a:ea typeface="Calibri"/>
+                <a:cs typeface="Calibri"/>
+              </a:rPr>
+              <a:t>content</a:t>
+            </a:r>
+            <a:r>
+              <a:rPr lang="it-IT" sz="1600" dirty="0">
+                <a:solidFill>
+                  <a:srgbClr val="333333"/>
+                </a:solidFill>
+                <a:latin typeface="Calibri"/>
+                <a:ea typeface="Calibri"/>
+                <a:cs typeface="Calibri"/>
+              </a:rPr>
+              <a:t> </a:t>
+            </a:r>
+            <a:r>
+              <a:rPr lang="it-IT" sz="1600" dirty="0" err="1">
+                <a:solidFill>
+                  <a:srgbClr val="333333"/>
+                </a:solidFill>
+                <a:latin typeface="Calibri"/>
+                <a:ea typeface="Calibri"/>
+                <a:cs typeface="Calibri"/>
+              </a:rPr>
+              <a:t>goes</a:t>
+            </a:r>
+            <a:r>
+              <a:rPr lang="it-IT" sz="1600" dirty="0">
+                <a:solidFill>
+                  <a:srgbClr val="333333"/>
+                </a:solidFill>
+                <a:latin typeface="Calibri"/>
+                <a:ea typeface="Calibri"/>
+                <a:cs typeface="Calibri"/>
+              </a:rPr>
+              <a:t> </a:t>
+            </a:r>
+            <a:r>
+              <a:rPr lang="it-IT" sz="1600" dirty="0" err="1">
+                <a:solidFill>
+                  <a:srgbClr val="333333"/>
+                </a:solidFill>
+                <a:latin typeface="Calibri"/>
+                <a:ea typeface="Calibri"/>
+                <a:cs typeface="Calibri"/>
+              </a:rPr>
+              <a:t>here</a:t>
+            </a:r>
+            <a:endParaRPr lang="it-IT" sz="1600" dirty="0">
+              <a:solidFill>
+                <a:srgbClr val="333333"/>
+              </a:solidFill>
+              <a:latin typeface="Calibri"/>
+              <a:ea typeface="Calibri"/>
+              <a:cs typeface="Calibri"/>
+            </a:endParaRPr>
           </a:p>
         </p:txBody>
       </p:sp>
@@ -2204,143 +3631,6 @@
           </a:p>
         </p:txBody>
       </p:sp>
-      <p:sp>
-        <p:nvSpPr>
-          <p:cNvPr id="7" name="CasellaDiTesto 6">
-            <a:extLst>
-              <a:ext uri="{FF2B5EF4-FFF2-40B4-BE49-F238E27FC236}">
-                <a16:creationId xmlns:a16="http://schemas.microsoft.com/office/drawing/2014/main" id="{2F939A93-FC59-4C53-B782-7BE556F191C7}"/>
-              </a:ext>
-            </a:extLst>
-          </p:cNvPr>
-          <p:cNvSpPr txBox="1"/>
-          <p:nvPr/>
-        </p:nvSpPr>
-        <p:spPr>
-          <a:xfrm>
-            <a:off x="317500" y="4851400"/>
-            <a:ext cx="7772400" cy="203200"/>
-          </a:xfrm>
-          <a:prstGeom prst="rect">
-            <a:avLst/>
-          </a:prstGeom>
-          <a:noFill/>
-        </p:spPr>
-        <p:txBody>
-          <a:bodyPr vertOverflow="overflow" vert="horz" wrap="square" rtlCol="0" anchor="t">
-            <a:noAutofit/>
-          </a:bodyPr>
-          <a:lstStyle/>
-          <a:p>
-            <a:pPr algn="l"/>
-            <a:r>
-              <a:rPr lang="it-IT" sz="900">
-                <a:solidFill>
-                  <a:srgbClr val="BBBBBB"/>
-                </a:solidFill>
-                <a:latin typeface="Calibri"/>
-                <a:ea typeface="Calibri"/>
-                <a:cs typeface="Calibri"/>
-              </a:rPr>
-              <a:t>Author  ·  Presentation Title</a:t>
-            </a:r>
-          </a:p>
-        </p:txBody>
-      </p:sp>
-      <p:sp>
-        <p:nvSpPr>
-          <p:cNvPr id="8" name="CasellaDiTesto 7">
-            <a:extLst>
-              <a:ext uri="{FF2B5EF4-FFF2-40B4-BE49-F238E27FC236}">
-                <a16:creationId xmlns:a16="http://schemas.microsoft.com/office/drawing/2014/main" id="{C0868FEB-59A4-42B1-81B2-0A9DDDAD81A6}"/>
-              </a:ext>
-            </a:extLst>
-          </p:cNvPr>
-          <p:cNvSpPr txBox="1"/>
-          <p:nvPr/>
-        </p:nvSpPr>
-        <p:spPr>
-          <a:xfrm>
-            <a:off x="8407400" y="4851400"/>
-            <a:ext cx="457200" cy="203200"/>
-          </a:xfrm>
-          <a:prstGeom prst="rect">
-            <a:avLst/>
-          </a:prstGeom>
-          <a:noFill/>
-        </p:spPr>
-        <p:txBody>
-          <a:bodyPr vertOverflow="overflow" vert="horz" wrap="square" rtlCol="0" anchor="t">
-            <a:noAutofit/>
-          </a:bodyPr>
-          <a:lstStyle/>
-          <a:p>
-            <a:pPr algn="l"/>
-            <a:r>
-              <a:rPr lang="it-IT" sz="900">
-                <a:solidFill>
-                  <a:srgbClr val="BBBBBB"/>
-                </a:solidFill>
-                <a:latin typeface="Calibri"/>
-                <a:ea typeface="Calibri"/>
-                <a:cs typeface="Calibri"/>
-              </a:rPr>
-              <a:t>5 / N</a:t>
-            </a:r>
-          </a:p>
-        </p:txBody>
-      </p:sp>
-      <p:pic>
-        <p:nvPicPr>
-          <p:cNvPr id="9" name="Immagine 8">
-            <a:extLst>
-              <a:ext uri="{FF2B5EF4-FFF2-40B4-BE49-F238E27FC236}">
-                <a16:creationId xmlns:a16="http://schemas.microsoft.com/office/drawing/2014/main" id="{33C2F695-8330-3EB3-8ABC-37EFA16728C3}"/>
-              </a:ext>
-            </a:extLst>
-          </p:cNvPr>
-          <p:cNvPicPr>
-            <a:picLocks noChangeAspect="1"/>
-          </p:cNvPicPr>
-          <p:nvPr/>
-        </p:nvPicPr>
-        <p:blipFill>
-          <a:blip r:embed="rId2"/>
-          <a:stretch>
-            <a:fillRect/>
-          </a:stretch>
-        </p:blipFill>
-        <p:spPr>
-          <a:xfrm>
-            <a:off x="7442200" y="4572000"/>
-            <a:ext cx="1524000" cy="548640"/>
-          </a:xfrm>
-          <a:prstGeom prst="rect">
-            <a:avLst/>
-          </a:prstGeom>
-        </p:spPr>
-      </p:pic>
-      <p:cxnSp>
-        <p:nvCxnSpPr>
-          <p:cNvPr id="20" name="Divider Line"/>
-          <p:cNvCxnSpPr/>
-          <p:nvPr/>
-        </p:nvCxnSpPr>
-        <p:spPr>
-          <a:xfrm>
-            <a:off x="320040" y="777240"/>
-            <a:ext cx="8503920" cy="0"/>
-          </a:xfrm>
-          <a:prstGeom prst="line">
-            <a:avLst/>
-          </a:prstGeom>
-          <a:ln w="12700">
-            <a:solidFill>
-              <a:srgbClr val="D6E4F0"/>
-            </a:solidFill>
-          </a:ln>
-        </p:spPr>
-      </p:cxnSp>
     </p:spTree>
     <p:extLst>
       <p:ext uri="{BB962C8B-B14F-4D97-AF65-F5344CB8AC3E}">
@@ -2355,7 +3645,7 @@
 </file>
 
 <file path=ppt/theme/theme1.xml><?xml version="1.0" encoding="utf-8"?>
-<a:theme xmlns:a="http://schemas.openxmlformats.org/drawingml/2006/main" name="Office Theme">
+<a:theme xmlns:a="http://schemas.openxmlformats.org/drawingml/2006/main" name="Content Slide">
   <a:themeElements>
     <a:clrScheme name="Office">
       <a:dk1>
@@ -2650,6 +3940,301 @@
 </file>
 
 <file path=ppt/theme/theme2.xml><?xml version="1.0" encoding="utf-8"?>
+<a:theme xmlns:a="http://schemas.openxmlformats.org/drawingml/2006/main" name="Frontespizio">
+  <a:themeElements>
+    <a:clrScheme name="Office">
+      <a:dk1>
+        <a:sysClr val="windowText" lastClr="000000"/>
+      </a:dk1>
+      <a:lt1>
+        <a:sysClr val="window" lastClr="FFFFFF"/>
+      </a:lt1>
+      <a:dk2>
+        <a:srgbClr val="44546A"/>
+      </a:dk2>
+      <a:lt2>
+        <a:srgbClr val="E7E6E6"/>
+      </a:lt2>
+      <a:accent1>
+        <a:srgbClr val="4472C4"/>
+      </a:accent1>
+      <a:accent2>
+        <a:srgbClr val="ED7D31"/>
+      </a:accent2>
+      <a:accent3>
+        <a:srgbClr val="A5A5A5"/>
+      </a:accent3>
+      <a:accent4>
+        <a:srgbClr val="FFC000"/>
+      </a:accent4>
+      <a:accent5>
+        <a:srgbClr val="5B9BD5"/>
+      </a:accent5>
+      <a:accent6>
+        <a:srgbClr val="70AD47"/>
+      </a:accent6>
+      <a:hlink>
+        <a:srgbClr val="0563C1"/>
+      </a:hlink>
+      <a:folHlink>
+        <a:srgbClr val="954F72"/>
+      </a:folHlink>
+    </a:clrScheme>
+    <a:fontScheme name="Office">
+      <a:majorFont>
+        <a:latin typeface="Calibri Light" panose="020F0302020204030204"/>
+        <a:ea typeface=""/>
+        <a:cs typeface=""/>
+        <a:font script="Jpan" typeface="游ゴシック Light"/>
+        <a:font script="Hang" typeface="맑은 고딕"/>
+        <a:font script="Hans" typeface="等线 Light"/>
+        <a:font script="Hant" typeface="新細明體"/>
+        <a:font script="Arab" typeface="Times New Roman"/>
+        <a:font script="Hebr" typeface="Times New Roman"/>
+        <a:font script="Thai" typeface="Angsana New"/>
+        <a:font script="Ethi" typeface="Nyala"/>
+        <a:font script="Beng" typeface="Vrinda"/>
+        <a:font script="Gujr" typeface="Shruti"/>
+        <a:font script="Khmr" typeface="MoolBoran"/>
+        <a:font script="Knda" typeface="Tunga"/>
+        <a:font script="Guru" typeface="Raavi"/>
+        <a:font script="Cans" typeface="Euphemia"/>
+        <a:font script="Cher" typeface="Plantagenet Cherokee"/>
+        <a:font script="Yiii" typeface="Microsoft Yi Baiti"/>
+        <a:font script="Tibt" typeface="Microsoft Himalaya"/>
+        <a:font script="Thaa" typeface="MV Boli"/>
+        <a:font script="Deva" typeface="Mangal"/>
+        <a:font script="Telu" typeface="Gautami"/>
+        <a:font script="Taml" typeface="Latha"/>
+        <a:font script="Syrc" typeface="Estrangelo Edessa"/>
+        <a:font script="Orya" typeface="Kalinga"/>
+        <a:font script="Mlym" typeface="Kartika"/>
+        <a:font script="Laoo" typeface="DokChampa"/>
+        <a:font script="Sinh" typeface="Iskoola Pota"/>
+        <a:font script="Mong" typeface="Mongolian Baiti"/>
+        <a:font script="Viet" typeface="Times New Roman"/>
+        <a:font script="Uigh" typeface="Microsoft Uighur"/>
+        <a:font script="Geor" typeface="Sylfaen"/>
+        <a:font script="Armn" typeface="Arial"/>
+        <a:font script="Bugi" typeface="Leelawadee UI"/>
+        <a:font script="Bopo" typeface="Microsoft JhengHei"/>
+        <a:font script="Java" typeface="Javanese Text"/>
+        <a:font script="Lisu" typeface="Segoe UI"/>
+        <a:font script="Mymr" typeface="Myanmar Text"/>
+        <a:font script="Nkoo" typeface="Ebrima"/>
+        <a:font script="Olck" typeface="Nirmala UI"/>
+        <a:font script="Osma" typeface="Ebrima"/>
+        <a:font script="Phag" typeface="Phagspa"/>
+        <a:font script="Syrn" typeface="Estrangelo Edessa"/>
+        <a:font script="Syrj" typeface="Estrangelo Edessa"/>
+        <a:font script="Syre" typeface="Estrangelo Edessa"/>
+        <a:font script="Sora" typeface="Nirmala UI"/>
+        <a:font script="Tale" typeface="Microsoft Tai Le"/>
+        <a:font script="Talu" typeface="Microsoft New Tai Lue"/>
+        <a:font script="Tfng" typeface="Ebrima"/>
+      </a:majorFont>
+      <a:minorFont>
+        <a:latin typeface="Calibri" panose="020F0502020204030204"/>
+        <a:ea typeface=""/>
+        <a:cs typeface=""/>
+        <a:font script="Jpan" typeface="游ゴシック"/>
+        <a:font script="Hang" typeface="맑은 고딕"/>
+        <a:font script="Hans" typeface="等线"/>
+        <a:font script="Hant" typeface="新細明體"/>
+        <a:font script="Arab" typeface="Arial"/>
+        <a:font script="Hebr" typeface="Arial"/>
+        <a:font script="Thai" typeface="Cordia New"/>
+        <a:font script="Ethi" typeface="Nyala"/>
+        <a:font script="Beng" typeface="Vrinda"/>
+        <a:font script="Gujr" typeface="Shruti"/>
+        <a:font script="Khmr" typeface="DaunPenh"/>
+        <a:font script="Knda" typeface="Tunga"/>
+        <a:font script="Guru" typeface="Raavi"/>
+        <a:font script="Cans" typeface="Euphemia"/>
+        <a:font script="Cher" typeface="Plantagenet Cherokee"/>
+        <a:font script="Yiii" typeface="Microsoft Yi Baiti"/>
+        <a:font script="Tibt" typeface="Microsoft Himalaya"/>
+        <a:font script="Thaa" typeface="MV Boli"/>
+        <a:font script="Deva" typeface="Mangal"/>
+        <a:font script="Telu" typeface="Gautami"/>
+        <a:font script="Taml" typeface="Latha"/>
+        <a:font script="Syrc" typeface="Estrangelo Edessa"/>
+        <a:font script="Orya" typeface="Kalinga"/>
+        <a:font script="Mlym" typeface="Kartika"/>
+        <a:font script="Laoo" typeface="DokChampa"/>
+        <a:font script="Sinh" typeface="Iskoola Pota"/>
+        <a:font script="Mong" typeface="Mongolian Baiti"/>
+        <a:font script="Viet" typeface="Arial"/>
+        <a:font script="Uigh" typeface="Microsoft Uighur"/>
+        <a:font script="Geor" typeface="Sylfaen"/>
+        <a:font script="Armn" typeface="Arial"/>
+        <a:font script="Bugi" typeface="Leelawadee UI"/>
+        <a:font script="Bopo" typeface="Microsoft JhengHei"/>
+        <a:font script="Java" typeface="Javanese Text"/>
+        <a:font script="Lisu" typeface="Segoe UI"/>
+        <a:font script="Mymr" typeface="Myanmar Text"/>
+        <a:font script="Nkoo" typeface="Ebrima"/>
+        <a:font script="Olck" typeface="Nirmala UI"/>
+        <a:font script="Osma" typeface="Ebrima"/>
+        <a:font script="Phag" typeface="Phagspa"/>
+        <a:font script="Syrn" typeface="Estrangelo Edessa"/>
+        <a:font script="Syrj" typeface="Estrangelo Edessa"/>
+        <a:font script="Syre" typeface="Estrangelo Edessa"/>
+        <a:font script="Sora" typeface="Nirmala UI"/>
+        <a:font script="Tale" typeface="Microsoft Tai Le"/>
+        <a:font script="Talu" typeface="Microsoft New Tai Lue"/>
+        <a:font script="Tfng" typeface="Ebrima"/>
+      </a:minorFont>
+    </a:fontScheme>
+    <a:fmtScheme name="Office">
+      <a:fillStyleLst>
+        <a:solidFill>
+          <a:schemeClr val="phClr"/>
+        </a:solidFill>
+        <a:gradFill rotWithShape="1">
+          <a:gsLst>
+            <a:gs pos="0">
+              <a:schemeClr val="phClr">
+                <a:lumMod val="110000"/>
+                <a:satMod val="105000"/>
+                <a:tint val="67000"/>
+              </a:schemeClr>
+            </a:gs>
+            <a:gs pos="50000">
+              <a:schemeClr val="phClr">
+                <a:lumMod val="105000"/>
+                <a:satMod val="103000"/>
+                <a:tint val="73000"/>
+              </a:schemeClr>
+            </a:gs>
+            <a:gs pos="100000">
+              <a:schemeClr val="phClr">
+                <a:lumMod val="105000"/>
+                <a:satMod val="109000"/>
+                <a:tint val="81000"/>
+              </a:schemeClr>
+            </a:gs>
+          </a:gsLst>
+          <a:lin ang="5400000" scaled="0"/>
+        </a:gradFill>
+        <a:gradFill rotWithShape="1">
+          <a:gsLst>
+            <a:gs pos="0">
+              <a:schemeClr val="phClr">
+                <a:satMod val="103000"/>
+                <a:lumMod val="102000"/>
+                <a:tint val="94000"/>
+              </a:schemeClr>
+            </a:gs>
+            <a:gs pos="50000">
+              <a:schemeClr val="phClr">
+                <a:satMod val="110000"/>
+                <a:lumMod val="100000"/>
+                <a:shade val="100000"/>
+              </a:schemeClr>
+            </a:gs>
+            <a:gs pos="100000">
+              <a:schemeClr val="phClr">
+                <a:lumMod val="99000"/>
+                <a:satMod val="120000"/>
+                <a:shade val="78000"/>
+              </a:schemeClr>
+            </a:gs>
+          </a:gsLst>
+          <a:lin ang="5400000" scaled="0"/>
+        </a:gradFill>
+      </a:fillStyleLst>
+      <a:lnStyleLst>
+        <a:ln w="6350" cap="flat" cmpd="sng" algn="ctr">
+          <a:solidFill>
+            <a:schemeClr val="phClr"/>
+          </a:solidFill>
+          <a:prstDash val="solid"/>
+          <a:miter lim="800000"/>
+        </a:ln>
+        <a:ln w="12700" cap="flat" cmpd="sng" algn="ctr">
+          <a:solidFill>
+            <a:schemeClr val="phClr"/>
+          </a:solidFill>
+          <a:prstDash val="solid"/>
+          <a:miter lim="800000"/>
+        </a:ln>
+        <a:ln w="19050" cap="flat" cmpd="sng" algn="ctr">
+          <a:solidFill>
+            <a:schemeClr val="phClr"/>
+          </a:solidFill>
+          <a:prstDash val="solid"/>
+          <a:miter lim="800000"/>
+        </a:ln>
+      </a:lnStyleLst>
+      <a:effectStyleLst>
+        <a:effectStyle>
+          <a:effectLst/>
+        </a:effectStyle>
+        <a:effectStyle>
+          <a:effectLst/>
+        </a:effectStyle>
+        <a:effectStyle>
+          <a:effectLst>
+            <a:outerShdw blurRad="57150" dist="19050" dir="5400000" algn="ctr" rotWithShape="0">
+              <a:srgbClr val="000000">
+                <a:alpha val="63000"/>
+              </a:srgbClr>
+            </a:outerShdw>
+          </a:effectLst>
+        </a:effectStyle>
+      </a:effectStyleLst>
+      <a:bgFillStyleLst>
+        <a:solidFill>
+          <a:schemeClr val="phClr"/>
+        </a:solidFill>
+        <a:solidFill>
+          <a:schemeClr val="phClr">
+            <a:tint val="95000"/>
+            <a:satMod val="170000"/>
+          </a:schemeClr>
+        </a:solidFill>
+        <a:gradFill rotWithShape="1">
+          <a:gsLst>
+            <a:gs pos="0">
+              <a:schemeClr val="phClr">
+                <a:tint val="93000"/>
+                <a:satMod val="150000"/>
+                <a:shade val="98000"/>
+                <a:lumMod val="102000"/>
+              </a:schemeClr>
+            </a:gs>
+            <a:gs pos="50000">
+              <a:schemeClr val="phClr">
+                <a:tint val="98000"/>
+                <a:satMod val="130000"/>
+                <a:shade val="90000"/>
+                <a:lumMod val="103000"/>
+              </a:schemeClr>
+            </a:gs>
+            <a:gs pos="100000">
+              <a:schemeClr val="phClr">
+                <a:shade val="63000"/>
+                <a:satMod val="120000"/>
+              </a:schemeClr>
+            </a:gs>
+          </a:gsLst>
+          <a:lin ang="5400000" scaled="0"/>
+        </a:gradFill>
+      </a:bgFillStyleLst>
+    </a:fmtScheme>
+  </a:themeElements>
+  <a:objectDefaults/>
+  <a:extraClrSchemeLst/>
+  <a:extLst>
+    <a:ext uri="{05A4C25C-085E-4340-85A3-A5531E510DB2}">
+      <thm15:themeFamily xmlns:thm15="http://schemas.microsoft.com/office/thememl/2012/main" name="Office Theme" id="{62F939B6-93AF-4DB8-9C6B-D6C7DFDC589F}" vid="{4A3C46E8-61CC-4603-A589-7422A47A8E4A}"/>
+    </a:ext>
+  </a:extLst>
+</a:theme>
+</file>
+
+<file path=ppt/theme/theme3.xml><?xml version="1.0" encoding="utf-8"?>
 <a:theme xmlns:a="http://schemas.openxmlformats.org/drawingml/2006/main" name="Tema di Office">
   <a:themeElements>
     <a:clrScheme name="Office">
@@ -2946,7 +4531,7 @@
 
 <file path=ppt/webextensions/taskpanes.xml><?xml version="1.0" encoding="utf-8"?>
 <wetp:taskpanes xmlns:wetp="http://schemas.microsoft.com/office/webextensions/taskpanes/2010/11">
-  <wetp:taskpane dockstate="right" visibility="0" width="438" row="0">
+  <wetp:taskpane dockstate="right" visibility="0" width="438" row="1">
     <wetp:webextensionref xmlns:r="http://schemas.openxmlformats.org/officeDocument/2006/relationships" r:id="rId1"/>
   </wetp:taskpane>
 </wetp:taskpanes>
